--- a/assets/figures-editable/c3-c4/c3-e20.pptx
+++ b/assets/figures-editable/c3-c4/c3-e20.pptx
@@ -3104,8 +3104,8 @@
         </p:nvSpPr>
         <p:spPr>
           <a:xfrm>
-            <a:off x="274320" y="137160"/>
-            <a:ext cx="11612880" cy="365760"/>
+            <a:off x="274320" y="118872"/>
+            <a:ext cx="11612880" cy="340105"/>
           </a:xfrm>
           <a:prstGeom prst="rect">
             <a:avLst/>
@@ -3114,7 +3114,7 @@
           <a:effectLst/>
         </p:spPr>
         <p:txBody>
-          <a:bodyPr wrap="square" lIns="27432" rIns="27432" tIns="18288" bIns="18288" anchor="ctr">
+          <a:bodyPr wrap="none" lIns="18288" rIns="18288" tIns="18288" bIns="18288" anchor="t">
             <a:spAutoFit/>
           </a:bodyPr>
           <a:lstStyle/>
@@ -3125,7 +3125,7 @@
               </a:spcAft>
             </a:pPr>
             <a:r>
-              <a:rPr sz="2100" b="0" i="0">
+              <a:rPr sz="1900" b="1" i="0">
                 <a:solidFill>
                   <a:srgbClr val="8EDBD4"/>
                 </a:solidFill>
@@ -3136,21 +3136,20 @@
           </a:p>
         </p:txBody>
       </p:sp>
-      <p:sp>
-        <p:nvSpPr>
-          <p:cNvPr id="3" name="C3-E20 rect 1" descr="sci-ppt:o001"/>
-          <p:cNvSpPr/>
+      <p:cxnSp>
+        <p:nvCxnSpPr>
+          <p:cNvPr id="3" name="C3-E20 line 1" descr="sci-ppt:o001"/>
+          <p:cNvCxnSpPr/>
           <p:nvPr/>
-        </p:nvSpPr>
-        <p:spPr>
-          <a:xfrm>
-            <a:off x="1920240" y="1463040"/>
-            <a:ext cx="6583680" cy="1005840"/>
-          </a:xfrm>
-          <a:prstGeom prst="rect">
+        </p:nvCxnSpPr>
+        <p:spPr>
+          <a:xfrm>
+            <a:off x="914400" y="4663440"/>
+            <a:ext cx="5486400" cy="0"/>
+          </a:xfrm>
+          <a:prstGeom prst="line">
             <a:avLst/>
           </a:prstGeom>
-          <a:noFill/>
           <a:ln w="19050">
             <a:solidFill>
               <a:srgbClr val="B4C7D2"/>
@@ -3158,72 +3157,83 @@
           </a:ln>
           <a:effectLst/>
         </p:spPr>
-        <p:txBody>
-          <a:bodyPr rtlCol="0" anchor="ctr"/>
-          <a:lstStyle/>
-          <a:p>
-            <a:pPr algn="ctr"/>
-          </a:p>
-        </p:txBody>
-      </p:sp>
+      </p:cxnSp>
       <p:cxnSp>
         <p:nvCxnSpPr>
-          <p:cNvPr id="4" name="C3-E20 arrow 2" descr="sci-ppt:o002"/>
+          <p:cNvPr id="4" name="C3-E20 line 2" descr="sci-ppt:o002"/>
           <p:cNvCxnSpPr/>
           <p:nvPr/>
         </p:nvCxnSpPr>
         <p:spPr>
           <a:xfrm>
-            <a:off x="731520" y="1965960"/>
-            <a:ext cx="2468880" cy="0"/>
+            <a:off x="914400" y="1463040"/>
+            <a:ext cx="0" cy="3200400"/>
           </a:xfrm>
           <a:prstGeom prst="line">
             <a:avLst/>
           </a:prstGeom>
-          <a:ln w="25400">
+          <a:ln w="19050">
             <a:solidFill>
-              <a:srgbClr val="8EDBD4"/>
+              <a:srgbClr val="B4C7D2"/>
             </a:solidFill>
-            <a:headEnd type="none" w="med" len="med"/>
-            <a:tailEnd type="triangle" w="med" len="med"/>
           </a:ln>
           <a:effectLst/>
         </p:spPr>
       </p:cxnSp>
       <p:cxnSp>
         <p:nvCxnSpPr>
-          <p:cNvPr id="5" name="C3-E20 arrow 3" descr="sci-ppt:o003"/>
+          <p:cNvPr id="5" name="C3-E20 line 3" descr="sci-ppt:o003"/>
           <p:cNvCxnSpPr/>
           <p:nvPr/>
         </p:nvCxnSpPr>
         <p:spPr>
           <a:xfrm>
-            <a:off x="7132320" y="1965960"/>
-            <a:ext cx="3749040" cy="0"/>
+            <a:off x="914400" y="4663440"/>
+            <a:ext cx="0" cy="64008"/>
           </a:xfrm>
           <a:prstGeom prst="line">
             <a:avLst/>
           </a:prstGeom>
-          <a:ln w="25400">
+          <a:ln w="12700">
             <a:solidFill>
-              <a:srgbClr val="8EDBD4"/>
+              <a:srgbClr val="B4C7D2"/>
             </a:solidFill>
-            <a:headEnd type="none" w="med" len="med"/>
-            <a:tailEnd type="triangle" w="med" len="med"/>
           </a:ln>
           <a:effectLst/>
         </p:spPr>
       </p:cxnSp>
-      <p:sp>
-        <p:nvSpPr>
-          <p:cNvPr id="6" name="C3-E20 text 4" descr="sci-ppt:o004"/>
+      <p:cxnSp>
+        <p:nvCxnSpPr>
+          <p:cNvPr id="6" name="C3-E20 line 4" descr="sci-ppt:o004"/>
+          <p:cNvCxnSpPr/>
+          <p:nvPr/>
+        </p:nvCxnSpPr>
+        <p:spPr>
+          <a:xfrm>
+            <a:off x="914400" y="1463040"/>
+            <a:ext cx="0" cy="3200400"/>
+          </a:xfrm>
+          <a:prstGeom prst="line">
+            <a:avLst/>
+          </a:prstGeom>
+          <a:ln w="7620">
+            <a:solidFill>
+              <a:srgbClr val="2E4756"/>
+            </a:solidFill>
+          </a:ln>
+          <a:effectLst/>
+        </p:spPr>
+      </p:cxnSp>
+      <p:sp>
+        <p:nvSpPr>
+          <p:cNvPr id="7" name="C3-E20 text 5" descr="sci-ppt:o005"/>
           <p:cNvSpPr txBox="1"/>
           <p:nvPr/>
         </p:nvSpPr>
         <p:spPr>
           <a:xfrm>
-            <a:off x="548640" y="2606040"/>
-            <a:ext cx="3657600" cy="457200"/>
+            <a:off x="457200" y="4745736"/>
+            <a:ext cx="914400" cy="208407"/>
           </a:xfrm>
           <a:prstGeom prst="rect">
             <a:avLst/>
@@ -3232,38 +3242,82 @@
           <a:effectLst/>
         </p:spPr>
         <p:txBody>
-          <a:bodyPr wrap="square" lIns="27432" rIns="27432" tIns="18288" bIns="18288" anchor="ctr">
+          <a:bodyPr wrap="none" lIns="18288" rIns="18288" tIns="18288" bIns="18288" anchor="t">
             <a:spAutoFit/>
           </a:bodyPr>
           <a:lstStyle/>
           <a:p>
-            <a:pPr algn="l">
+            <a:pPr algn="ctr">
               <a:spcAft>
                 <a:spcPts val="0"/>
               </a:spcAft>
             </a:pPr>
             <a:r>
-              <a:rPr sz="1800" b="0" i="0">
+              <a:rPr sz="1050" b="0" i="0">
                 <a:solidFill>
-                  <a:srgbClr val="E7F0F3"/>
+                  <a:srgbClr val="B4C7D2"/>
                 </a:solidFill>
                 <a:latin typeface="Arial"/>
               </a:rPr>
-              <a:t>Incoming flux A v |z</a:t>
-            </a:r>
-          </a:p>
-        </p:txBody>
-      </p:sp>
-      <p:sp>
-        <p:nvSpPr>
-          <p:cNvPr id="7" name="C3-E20 text 5" descr="sci-ppt:o005"/>
+              <a:t>0.00</a:t>
+            </a:r>
+          </a:p>
+        </p:txBody>
+      </p:sp>
+      <p:cxnSp>
+        <p:nvCxnSpPr>
+          <p:cNvPr id="8" name="C3-E20 line 6" descr="sci-ppt:o006"/>
+          <p:cNvCxnSpPr/>
+          <p:nvPr/>
+        </p:nvCxnSpPr>
+        <p:spPr>
+          <a:xfrm>
+            <a:off x="3657600" y="4663440"/>
+            <a:ext cx="0" cy="64008"/>
+          </a:xfrm>
+          <a:prstGeom prst="line">
+            <a:avLst/>
+          </a:prstGeom>
+          <a:ln w="12700">
+            <a:solidFill>
+              <a:srgbClr val="B4C7D2"/>
+            </a:solidFill>
+          </a:ln>
+          <a:effectLst/>
+        </p:spPr>
+      </p:cxnSp>
+      <p:cxnSp>
+        <p:nvCxnSpPr>
+          <p:cNvPr id="9" name="C3-E20 line 7" descr="sci-ppt:o007"/>
+          <p:cNvCxnSpPr/>
+          <p:nvPr/>
+        </p:nvCxnSpPr>
+        <p:spPr>
+          <a:xfrm>
+            <a:off x="3657600" y="1463040"/>
+            <a:ext cx="0" cy="3200400"/>
+          </a:xfrm>
+          <a:prstGeom prst="line">
+            <a:avLst/>
+          </a:prstGeom>
+          <a:ln w="7620">
+            <a:solidFill>
+              <a:srgbClr val="2E4756"/>
+            </a:solidFill>
+          </a:ln>
+          <a:effectLst/>
+        </p:spPr>
+      </p:cxnSp>
+      <p:sp>
+        <p:nvSpPr>
+          <p:cNvPr id="10" name="C3-E20 text 8" descr="sci-ppt:o008"/>
           <p:cNvSpPr txBox="1"/>
           <p:nvPr/>
         </p:nvSpPr>
         <p:spPr>
           <a:xfrm>
-            <a:off x="7406640" y="2606040"/>
-            <a:ext cx="4114800" cy="457200"/>
+            <a:off x="3200400" y="4745736"/>
+            <a:ext cx="914400" cy="208407"/>
           </a:xfrm>
           <a:prstGeom prst="rect">
             <a:avLst/>
@@ -3272,160 +3326,24 @@
           <a:effectLst/>
         </p:spPr>
         <p:txBody>
-          <a:bodyPr wrap="square" lIns="27432" rIns="27432" tIns="18288" bIns="18288" anchor="ctr">
+          <a:bodyPr wrap="none" lIns="18288" rIns="18288" tIns="18288" bIns="18288" anchor="t">
             <a:spAutoFit/>
           </a:bodyPr>
           <a:lstStyle/>
           <a:p>
-            <a:pPr algn="l">
+            <a:pPr algn="ctr">
               <a:spcAft>
                 <a:spcPts val="0"/>
               </a:spcAft>
             </a:pPr>
             <a:r>
-              <a:rPr sz="1800" b="0" i="0">
+              <a:rPr sz="1050" b="0" i="0">
                 <a:solidFill>
-                  <a:srgbClr val="E7F0F3"/>
+                  <a:srgbClr val="B4C7D2"/>
                 </a:solidFill>
                 <a:latin typeface="Arial"/>
               </a:rPr>
-              <a:t>Outgoing flux A v |z+Δz</a:t>
-            </a:r>
-          </a:p>
-        </p:txBody>
-      </p:sp>
-      <p:sp>
-        <p:nvSpPr>
-          <p:cNvPr id="8" name="C3-E20 text 6" descr="sci-ppt:o006"/>
-          <p:cNvSpPr txBox="1"/>
-          <p:nvPr/>
-        </p:nvSpPr>
-        <p:spPr>
-          <a:xfrm>
-            <a:off x="3840480" y="1645920"/>
-            <a:ext cx="3657600" cy="548640"/>
-          </a:xfrm>
-          <a:prstGeom prst="rect">
-            <a:avLst/>
-          </a:prstGeom>
-          <a:noFill/>
-          <a:effectLst/>
-        </p:spPr>
-        <p:txBody>
-          <a:bodyPr wrap="square" lIns="27432" rIns="27432" tIns="18288" bIns="18288" anchor="ctr">
-            <a:spAutoFit/>
-          </a:bodyPr>
-          <a:lstStyle/>
-          <a:p>
-            <a:pPr algn="l">
-              <a:spcAft>
-                <a:spcPts val="0"/>
-              </a:spcAft>
-            </a:pPr>
-            <a:r>
-              <a:rPr sz="1800" b="0" i="0">
-                <a:solidFill>
-                  <a:srgbClr val="E7F0F3"/>
-                </a:solidFill>
-                <a:latin typeface="Arial"/>
-              </a:rPr>
-              <a:t>Fixed axial slice Δz</a:t>
-            </a:r>
-          </a:p>
-          <a:p>
-            <a:pPr algn="l">
-              <a:spcAft>
-                <a:spcPts val="0"/>
-              </a:spcAft>
-            </a:pPr>
-            <a:r>
-              <a:rPr sz="1800" b="0" i="0">
-                <a:solidFill>
-                  <a:srgbClr val="E7F0F3"/>
-                </a:solidFill>
-                <a:latin typeface="Arial"/>
-              </a:rPr>
-              <a:t>A(z,t) = πa²</a:t>
-            </a:r>
-          </a:p>
-        </p:txBody>
-      </p:sp>
-      <p:sp>
-        <p:nvSpPr>
-          <p:cNvPr id="9" name="C3-E20 text 7" descr="sci-ppt:o007"/>
-          <p:cNvSpPr txBox="1"/>
-          <p:nvPr/>
-        </p:nvSpPr>
-        <p:spPr>
-          <a:xfrm>
-            <a:off x="731520" y="777240"/>
-            <a:ext cx="10972800" cy="365760"/>
-          </a:xfrm>
-          <a:prstGeom prst="rect">
-            <a:avLst/>
-          </a:prstGeom>
-          <a:noFill/>
-          <a:effectLst/>
-        </p:spPr>
-        <p:txBody>
-          <a:bodyPr wrap="square" lIns="27432" rIns="27432" tIns="18288" bIns="18288" anchor="ctr">
-            <a:spAutoFit/>
-          </a:bodyPr>
-          <a:lstStyle/>
-          <a:p>
-            <a:pPr algn="l">
-              <a:spcAft>
-                <a:spcPts val="0"/>
-              </a:spcAft>
-            </a:pPr>
-            <a:r>
-              <a:rPr sz="1900" b="0" i="0">
-                <a:solidFill>
-                  <a:srgbClr val="8EDBD4"/>
-                </a:solidFill>
-                <a:latin typeface="Arial"/>
-              </a:rPr>
-              <a:t>Slender liquid: axial velocity v(z,t); radius a(z,t)</a:t>
-            </a:r>
-          </a:p>
-        </p:txBody>
-      </p:sp>
-      <p:sp>
-        <p:nvSpPr>
-          <p:cNvPr id="10" name="C3-E20 text 8" descr="sci-ppt:o008"/>
-          <p:cNvSpPr txBox="1"/>
-          <p:nvPr/>
-        </p:nvSpPr>
-        <p:spPr>
-          <a:xfrm>
-            <a:off x="914400" y="3337560"/>
-            <a:ext cx="10607040" cy="365760"/>
-          </a:xfrm>
-          <a:prstGeom prst="rect">
-            <a:avLst/>
-          </a:prstGeom>
-          <a:noFill/>
-          <a:effectLst/>
-        </p:spPr>
-        <p:txBody>
-          <a:bodyPr wrap="square" lIns="27432" rIns="27432" tIns="18288" bIns="18288" anchor="ctr">
-            <a:spAutoFit/>
-          </a:bodyPr>
-          <a:lstStyle/>
-          <a:p>
-            <a:pPr algn="l">
-              <a:spcAft>
-                <a:spcPts val="0"/>
-              </a:spcAft>
-            </a:pPr>
-            <a:r>
-              <a:rPr sz="1700" b="0" i="0">
-                <a:solidFill>
-                  <a:srgbClr val="E7F0F3"/>
-                </a:solidFill>
-                <a:latin typeface="Arial"/>
-              </a:rPr>
-              <a:t>Axial extension: τ_zz − τ_rr = 3μ ∂zv; capillary force follows ∂zκ.</a:t>
+              <a:t>3.14</a:t>
             </a:r>
           </a:p>
         </p:txBody>
@@ -3438,30 +3356,52 @@
         </p:nvCxnSpPr>
         <p:spPr>
           <a:xfrm>
-            <a:off x="274320" y="3977639"/>
-            <a:ext cx="11612880" cy="0"/>
+            <a:off x="6400800" y="4663440"/>
+            <a:ext cx="0" cy="64008"/>
           </a:xfrm>
           <a:prstGeom prst="line">
             <a:avLst/>
           </a:prstGeom>
           <a:ln w="12700">
             <a:solidFill>
-              <a:srgbClr val="405967"/>
+              <a:srgbClr val="B4C7D2"/>
             </a:solidFill>
           </a:ln>
           <a:effectLst/>
         </p:spPr>
       </p:cxnSp>
-      <p:sp>
-        <p:nvSpPr>
-          <p:cNvPr id="12" name="C3-E20 text 10" descr="sci-ppt:o010"/>
+      <p:cxnSp>
+        <p:nvCxnSpPr>
+          <p:cNvPr id="12" name="C3-E20 line 10" descr="sci-ppt:o010"/>
+          <p:cNvCxnSpPr/>
+          <p:nvPr/>
+        </p:nvCxnSpPr>
+        <p:spPr>
+          <a:xfrm>
+            <a:off x="6400800" y="1463040"/>
+            <a:ext cx="0" cy="3200400"/>
+          </a:xfrm>
+          <a:prstGeom prst="line">
+            <a:avLst/>
+          </a:prstGeom>
+          <a:ln w="7620">
+            <a:solidFill>
+              <a:srgbClr val="2E4756"/>
+            </a:solidFill>
+          </a:ln>
+          <a:effectLst/>
+        </p:spPr>
+      </p:cxnSp>
+      <p:sp>
+        <p:nvSpPr>
+          <p:cNvPr id="13" name="C3-E20 text 11" descr="sci-ppt:o011"/>
           <p:cNvSpPr txBox="1"/>
           <p:nvPr/>
         </p:nvSpPr>
         <p:spPr>
           <a:xfrm>
-            <a:off x="320040" y="4096512"/>
-            <a:ext cx="5715000" cy="246888"/>
+            <a:off x="5943600" y="4745736"/>
+            <a:ext cx="914400" cy="208407"/>
           </a:xfrm>
           <a:prstGeom prst="rect">
             <a:avLst/>
@@ -3470,7 +3410,1893 @@
           <a:effectLst/>
         </p:spPr>
         <p:txBody>
-          <a:bodyPr wrap="square" lIns="27432" rIns="27432" tIns="18288" bIns="18288" anchor="ctr">
+          <a:bodyPr wrap="none" lIns="18288" rIns="18288" tIns="18288" bIns="18288" anchor="t">
+            <a:spAutoFit/>
+          </a:bodyPr>
+          <a:lstStyle/>
+          <a:p>
+            <a:pPr algn="ctr">
+              <a:spcAft>
+                <a:spcPts val="0"/>
+              </a:spcAft>
+            </a:pPr>
+            <a:r>
+              <a:rPr sz="1050" b="0" i="0">
+                <a:solidFill>
+                  <a:srgbClr val="B4C7D2"/>
+                </a:solidFill>
+                <a:latin typeface="Arial"/>
+              </a:rPr>
+              <a:t>6.28</a:t>
+            </a:r>
+          </a:p>
+        </p:txBody>
+      </p:sp>
+      <p:cxnSp>
+        <p:nvCxnSpPr>
+          <p:cNvPr id="14" name="C3-E20 line 12" descr="sci-ppt:o012"/>
+          <p:cNvCxnSpPr/>
+          <p:nvPr/>
+        </p:nvCxnSpPr>
+        <p:spPr>
+          <a:xfrm>
+            <a:off x="850392" y="4130039"/>
+            <a:ext cx="64008" cy="0"/>
+          </a:xfrm>
+          <a:prstGeom prst="line">
+            <a:avLst/>
+          </a:prstGeom>
+          <a:ln w="12700">
+            <a:solidFill>
+              <a:srgbClr val="B4C7D2"/>
+            </a:solidFill>
+          </a:ln>
+          <a:effectLst/>
+        </p:spPr>
+      </p:cxnSp>
+      <p:cxnSp>
+        <p:nvCxnSpPr>
+          <p:cNvPr id="15" name="C3-E20 line 13" descr="sci-ppt:o013"/>
+          <p:cNvCxnSpPr/>
+          <p:nvPr/>
+        </p:nvCxnSpPr>
+        <p:spPr>
+          <a:xfrm>
+            <a:off x="914400" y="4130039"/>
+            <a:ext cx="5486400" cy="0"/>
+          </a:xfrm>
+          <a:prstGeom prst="line">
+            <a:avLst/>
+          </a:prstGeom>
+          <a:ln w="7620">
+            <a:solidFill>
+              <a:srgbClr val="2E4756"/>
+            </a:solidFill>
+          </a:ln>
+          <a:effectLst/>
+        </p:spPr>
+      </p:cxnSp>
+      <p:sp>
+        <p:nvSpPr>
+          <p:cNvPr id="16" name="C3-E20 text 14" descr="sci-ppt:o014"/>
+          <p:cNvSpPr txBox="1"/>
+          <p:nvPr/>
+        </p:nvSpPr>
+        <p:spPr>
+          <a:xfrm>
+            <a:off x="45720" y="4047743"/>
+            <a:ext cx="777240" cy="208407"/>
+          </a:xfrm>
+          <a:prstGeom prst="rect">
+            <a:avLst/>
+          </a:prstGeom>
+          <a:noFill/>
+          <a:effectLst/>
+        </p:spPr>
+        <p:txBody>
+          <a:bodyPr wrap="none" lIns="18288" rIns="18288" tIns="18288" bIns="18288" anchor="t">
+            <a:spAutoFit/>
+          </a:bodyPr>
+          <a:lstStyle/>
+          <a:p>
+            <a:pPr algn="r">
+              <a:spcAft>
+                <a:spcPts val="0"/>
+              </a:spcAft>
+            </a:pPr>
+            <a:r>
+              <a:rPr sz="1050" b="0" i="0">
+                <a:solidFill>
+                  <a:srgbClr val="B4C7D2"/>
+                </a:solidFill>
+                <a:latin typeface="Arial"/>
+              </a:rPr>
+              <a:t>0.8</a:t>
+            </a:r>
+          </a:p>
+        </p:txBody>
+      </p:sp>
+      <p:cxnSp>
+        <p:nvCxnSpPr>
+          <p:cNvPr id="17" name="C3-E20 line 15" descr="sci-ppt:o015"/>
+          <p:cNvCxnSpPr/>
+          <p:nvPr/>
+        </p:nvCxnSpPr>
+        <p:spPr>
+          <a:xfrm>
+            <a:off x="850392" y="3063239"/>
+            <a:ext cx="64008" cy="0"/>
+          </a:xfrm>
+          <a:prstGeom prst="line">
+            <a:avLst/>
+          </a:prstGeom>
+          <a:ln w="12700">
+            <a:solidFill>
+              <a:srgbClr val="B4C7D2"/>
+            </a:solidFill>
+          </a:ln>
+          <a:effectLst/>
+        </p:spPr>
+      </p:cxnSp>
+      <p:cxnSp>
+        <p:nvCxnSpPr>
+          <p:cNvPr id="18" name="C3-E20 line 16" descr="sci-ppt:o016"/>
+          <p:cNvCxnSpPr/>
+          <p:nvPr/>
+        </p:nvCxnSpPr>
+        <p:spPr>
+          <a:xfrm>
+            <a:off x="914400" y="3063239"/>
+            <a:ext cx="5486400" cy="0"/>
+          </a:xfrm>
+          <a:prstGeom prst="line">
+            <a:avLst/>
+          </a:prstGeom>
+          <a:ln w="7620">
+            <a:solidFill>
+              <a:srgbClr val="2E4756"/>
+            </a:solidFill>
+          </a:ln>
+          <a:effectLst/>
+        </p:spPr>
+      </p:cxnSp>
+      <p:sp>
+        <p:nvSpPr>
+          <p:cNvPr id="19" name="C3-E20 text 17" descr="sci-ppt:o017"/>
+          <p:cNvSpPr txBox="1"/>
+          <p:nvPr/>
+        </p:nvSpPr>
+        <p:spPr>
+          <a:xfrm>
+            <a:off x="45720" y="2980944"/>
+            <a:ext cx="777240" cy="208407"/>
+          </a:xfrm>
+          <a:prstGeom prst="rect">
+            <a:avLst/>
+          </a:prstGeom>
+          <a:noFill/>
+          <a:effectLst/>
+        </p:spPr>
+        <p:txBody>
+          <a:bodyPr wrap="none" lIns="18288" rIns="18288" tIns="18288" bIns="18288" anchor="t">
+            <a:spAutoFit/>
+          </a:bodyPr>
+          <a:lstStyle/>
+          <a:p>
+            <a:pPr algn="r">
+              <a:spcAft>
+                <a:spcPts val="0"/>
+              </a:spcAft>
+            </a:pPr>
+            <a:r>
+              <a:rPr sz="1050" b="0" i="0">
+                <a:solidFill>
+                  <a:srgbClr val="B4C7D2"/>
+                </a:solidFill>
+                <a:latin typeface="Arial"/>
+              </a:rPr>
+              <a:t>1.0</a:t>
+            </a:r>
+          </a:p>
+        </p:txBody>
+      </p:sp>
+      <p:cxnSp>
+        <p:nvCxnSpPr>
+          <p:cNvPr id="20" name="C3-E20 line 18" descr="sci-ppt:o018"/>
+          <p:cNvCxnSpPr/>
+          <p:nvPr/>
+        </p:nvCxnSpPr>
+        <p:spPr>
+          <a:xfrm>
+            <a:off x="850392" y="1996439"/>
+            <a:ext cx="64008" cy="0"/>
+          </a:xfrm>
+          <a:prstGeom prst="line">
+            <a:avLst/>
+          </a:prstGeom>
+          <a:ln w="12700">
+            <a:solidFill>
+              <a:srgbClr val="B4C7D2"/>
+            </a:solidFill>
+          </a:ln>
+          <a:effectLst/>
+        </p:spPr>
+      </p:cxnSp>
+      <p:cxnSp>
+        <p:nvCxnSpPr>
+          <p:cNvPr id="21" name="C3-E20 line 19" descr="sci-ppt:o019"/>
+          <p:cNvCxnSpPr/>
+          <p:nvPr/>
+        </p:nvCxnSpPr>
+        <p:spPr>
+          <a:xfrm>
+            <a:off x="914400" y="1996439"/>
+            <a:ext cx="5486400" cy="0"/>
+          </a:xfrm>
+          <a:prstGeom prst="line">
+            <a:avLst/>
+          </a:prstGeom>
+          <a:ln w="7620">
+            <a:solidFill>
+              <a:srgbClr val="2E4756"/>
+            </a:solidFill>
+          </a:ln>
+          <a:effectLst/>
+        </p:spPr>
+      </p:cxnSp>
+      <p:sp>
+        <p:nvSpPr>
+          <p:cNvPr id="22" name="C3-E20 text 20" descr="sci-ppt:o020"/>
+          <p:cNvSpPr txBox="1"/>
+          <p:nvPr/>
+        </p:nvSpPr>
+        <p:spPr>
+          <a:xfrm>
+            <a:off x="45720" y="1914144"/>
+            <a:ext cx="777240" cy="208407"/>
+          </a:xfrm>
+          <a:prstGeom prst="rect">
+            <a:avLst/>
+          </a:prstGeom>
+          <a:noFill/>
+          <a:effectLst/>
+        </p:spPr>
+        <p:txBody>
+          <a:bodyPr wrap="none" lIns="18288" rIns="18288" tIns="18288" bIns="18288" anchor="t">
+            <a:spAutoFit/>
+          </a:bodyPr>
+          <a:lstStyle/>
+          <a:p>
+            <a:pPr algn="r">
+              <a:spcAft>
+                <a:spcPts val="0"/>
+              </a:spcAft>
+            </a:pPr>
+            <a:r>
+              <a:rPr sz="1050" b="0" i="0">
+                <a:solidFill>
+                  <a:srgbClr val="B4C7D2"/>
+                </a:solidFill>
+                <a:latin typeface="Arial"/>
+              </a:rPr>
+              <a:t>1.2</a:t>
+            </a:r>
+          </a:p>
+        </p:txBody>
+      </p:sp>
+      <p:sp>
+        <p:nvSpPr>
+          <p:cNvPr id="23" name="C3-E20 text 21" descr="sci-ppt:o021"/>
+          <p:cNvSpPr txBox="1"/>
+          <p:nvPr/>
+        </p:nvSpPr>
+        <p:spPr>
+          <a:xfrm>
+            <a:off x="914400" y="4946903"/>
+            <a:ext cx="5486400" cy="231648"/>
+          </a:xfrm>
+          <a:prstGeom prst="rect">
+            <a:avLst/>
+          </a:prstGeom>
+          <a:noFill/>
+          <a:effectLst/>
+        </p:spPr>
+        <p:txBody>
+          <a:bodyPr wrap="none" lIns="18288" rIns="18288" tIns="18288" bIns="18288" anchor="t">
+            <a:spAutoFit/>
+          </a:bodyPr>
+          <a:lstStyle/>
+          <a:p>
+            <a:pPr algn="ctr">
+              <a:spcAft>
+                <a:spcPts val="0"/>
+              </a:spcAft>
+            </a:pPr>
+            <a:r>
+              <a:rPr sz="1200" b="0" i="0">
+                <a:solidFill>
+                  <a:srgbClr val="E7F0F3"/>
+                </a:solidFill>
+                <a:latin typeface="Arial"/>
+              </a:rPr>
+              <a:t>k z  (one wavelength)</a:t>
+            </a:r>
+          </a:p>
+        </p:txBody>
+      </p:sp>
+      <p:sp>
+        <p:nvSpPr>
+          <p:cNvPr id="24" name="C3-E20 text 22" descr="sci-ppt:o022"/>
+          <p:cNvSpPr txBox="1"/>
+          <p:nvPr/>
+        </p:nvSpPr>
+        <p:spPr>
+          <a:xfrm>
+            <a:off x="365760" y="1115568"/>
+            <a:ext cx="5486400" cy="231648"/>
+          </a:xfrm>
+          <a:prstGeom prst="rect">
+            <a:avLst/>
+          </a:prstGeom>
+          <a:noFill/>
+          <a:effectLst/>
+        </p:spPr>
+        <p:txBody>
+          <a:bodyPr wrap="none" lIns="18288" rIns="18288" tIns="18288" bIns="18288" anchor="t">
+            <a:spAutoFit/>
+          </a:bodyPr>
+          <a:lstStyle/>
+          <a:p>
+            <a:pPr algn="l">
+              <a:spcAft>
+                <a:spcPts val="0"/>
+              </a:spcAft>
+            </a:pPr>
+            <a:r>
+              <a:rPr sz="1200" b="0" i="0">
+                <a:solidFill>
+                  <a:srgbClr val="E7F0F3"/>
+                </a:solidFill>
+                <a:latin typeface="Arial"/>
+              </a:rPr>
+              <a:t>κ a₀</a:t>
+            </a:r>
+          </a:p>
+        </p:txBody>
+      </p:sp>
+      <p:sp>
+        <p:nvSpPr>
+          <p:cNvPr id="25" name="C3-E20 polygon 23" descr="sci-ppt:o023"/>
+          <p:cNvSpPr/>
+          <p:nvPr/>
+        </p:nvSpPr>
+        <p:spPr>
+          <a:xfrm>
+            <a:off x="914400" y="2649545"/>
+            <a:ext cx="5486400" cy="671555"/>
+          </a:xfrm>
+          <a:custGeom>
+            <a:avLst/>
+            <a:gdLst/>
+            <a:ahLst/>
+            <a:cxnLst/>
+            <a:rect l="l" t="t" r="r" b="b"/>
+            <a:pathLst>
+              <a:path w="5486400" h="671555">
+                <a:moveTo>
+                  <a:pt x="0" y="671555"/>
+                </a:moveTo>
+                <a:lnTo>
+                  <a:pt x="36698" y="671417"/>
+                </a:lnTo>
+                <a:lnTo>
+                  <a:pt x="73396" y="671002"/>
+                </a:lnTo>
+                <a:lnTo>
+                  <a:pt x="110094" y="670309"/>
+                </a:lnTo>
+                <a:lnTo>
+                  <a:pt x="146793" y="669335"/>
+                </a:lnTo>
+                <a:lnTo>
+                  <a:pt x="183491" y="668077"/>
+                </a:lnTo>
+                <a:lnTo>
+                  <a:pt x="220189" y="666531"/>
+                </a:lnTo>
+                <a:lnTo>
+                  <a:pt x="256888" y="664691"/>
+                </a:lnTo>
+                <a:lnTo>
+                  <a:pt x="293586" y="662553"/>
+                </a:lnTo>
+                <a:lnTo>
+                  <a:pt x="330284" y="660108"/>
+                </a:lnTo>
+                <a:lnTo>
+                  <a:pt x="366983" y="657351"/>
+                </a:lnTo>
+                <a:lnTo>
+                  <a:pt x="403681" y="654272"/>
+                </a:lnTo>
+                <a:lnTo>
+                  <a:pt x="440379" y="650864"/>
+                </a:lnTo>
+                <a:lnTo>
+                  <a:pt x="477078" y="647118"/>
+                </a:lnTo>
+                <a:lnTo>
+                  <a:pt x="513776" y="643025"/>
+                </a:lnTo>
+                <a:lnTo>
+                  <a:pt x="550474" y="638576"/>
+                </a:lnTo>
+                <a:lnTo>
+                  <a:pt x="587173" y="633762"/>
+                </a:lnTo>
+                <a:lnTo>
+                  <a:pt x="623871" y="628572"/>
+                </a:lnTo>
+                <a:lnTo>
+                  <a:pt x="660569" y="622999"/>
+                </a:lnTo>
+                <a:lnTo>
+                  <a:pt x="697268" y="617034"/>
+                </a:lnTo>
+                <a:lnTo>
+                  <a:pt x="733966" y="610668"/>
+                </a:lnTo>
+                <a:lnTo>
+                  <a:pt x="770664" y="603893"/>
+                </a:lnTo>
+                <a:lnTo>
+                  <a:pt x="807363" y="596702"/>
+                </a:lnTo>
+                <a:lnTo>
+                  <a:pt x="844061" y="589089"/>
+                </a:lnTo>
+                <a:lnTo>
+                  <a:pt x="880759" y="581048"/>
+                </a:lnTo>
+                <a:lnTo>
+                  <a:pt x="917458" y="572576"/>
+                </a:lnTo>
+                <a:lnTo>
+                  <a:pt x="954156" y="563668"/>
+                </a:lnTo>
+                <a:lnTo>
+                  <a:pt x="990854" y="554323"/>
+                </a:lnTo>
+                <a:lnTo>
+                  <a:pt x="1027553" y="544541"/>
+                </a:lnTo>
+                <a:lnTo>
+                  <a:pt x="1064251" y="534321"/>
+                </a:lnTo>
+                <a:lnTo>
+                  <a:pt x="1100949" y="523668"/>
+                </a:lnTo>
+                <a:lnTo>
+                  <a:pt x="1137648" y="512585"/>
+                </a:lnTo>
+                <a:lnTo>
+                  <a:pt x="1174346" y="501079"/>
+                </a:lnTo>
+                <a:lnTo>
+                  <a:pt x="1211044" y="489158"/>
+                </a:lnTo>
+                <a:lnTo>
+                  <a:pt x="1247743" y="476831"/>
+                </a:lnTo>
+                <a:lnTo>
+                  <a:pt x="1284441" y="464111"/>
+                </a:lnTo>
+                <a:lnTo>
+                  <a:pt x="1321139" y="451012"/>
+                </a:lnTo>
+                <a:lnTo>
+                  <a:pt x="1357838" y="437551"/>
+                </a:lnTo>
+                <a:lnTo>
+                  <a:pt x="1394536" y="423747"/>
+                </a:lnTo>
+                <a:lnTo>
+                  <a:pt x="1431234" y="409620"/>
+                </a:lnTo>
+                <a:lnTo>
+                  <a:pt x="1467933" y="395193"/>
+                </a:lnTo>
+                <a:lnTo>
+                  <a:pt x="1504631" y="380493"/>
+                </a:lnTo>
+                <a:lnTo>
+                  <a:pt x="1541329" y="365546"/>
+                </a:lnTo>
+                <a:lnTo>
+                  <a:pt x="1578028" y="350384"/>
+                </a:lnTo>
+                <a:lnTo>
+                  <a:pt x="1614726" y="335037"/>
+                </a:lnTo>
+                <a:lnTo>
+                  <a:pt x="1651424" y="319541"/>
+                </a:lnTo>
+                <a:lnTo>
+                  <a:pt x="1688123" y="303932"/>
+                </a:lnTo>
+                <a:lnTo>
+                  <a:pt x="1724821" y="288249"/>
+                </a:lnTo>
+                <a:lnTo>
+                  <a:pt x="1761519" y="272530"/>
+                </a:lnTo>
+                <a:lnTo>
+                  <a:pt x="1798218" y="256820"/>
+                </a:lnTo>
+                <a:lnTo>
+                  <a:pt x="1834916" y="241160"/>
+                </a:lnTo>
+                <a:lnTo>
+                  <a:pt x="1871614" y="225597"/>
+                </a:lnTo>
+                <a:lnTo>
+                  <a:pt x="1908313" y="210176"/>
+                </a:lnTo>
+                <a:lnTo>
+                  <a:pt x="1945011" y="194944"/>
+                </a:lnTo>
+                <a:lnTo>
+                  <a:pt x="1981709" y="179951"/>
+                </a:lnTo>
+                <a:lnTo>
+                  <a:pt x="2018408" y="165244"/>
+                </a:lnTo>
+                <a:lnTo>
+                  <a:pt x="2055106" y="150872"/>
+                </a:lnTo>
+                <a:lnTo>
+                  <a:pt x="2091804" y="136885"/>
+                </a:lnTo>
+                <a:lnTo>
+                  <a:pt x="2128503" y="123332"/>
+                </a:lnTo>
+                <a:lnTo>
+                  <a:pt x="2165201" y="110261"/>
+                </a:lnTo>
+                <a:lnTo>
+                  <a:pt x="2201899" y="97719"/>
+                </a:lnTo>
+                <a:lnTo>
+                  <a:pt x="2238597" y="85754"/>
+                </a:lnTo>
+                <a:lnTo>
+                  <a:pt x="2275296" y="74411"/>
+                </a:lnTo>
+                <a:lnTo>
+                  <a:pt x="2311994" y="63734"/>
+                </a:lnTo>
+                <a:lnTo>
+                  <a:pt x="2348692" y="53764"/>
+                </a:lnTo>
+                <a:lnTo>
+                  <a:pt x="2385391" y="44540"/>
+                </a:lnTo>
+                <a:lnTo>
+                  <a:pt x="2422089" y="36101"/>
+                </a:lnTo>
+                <a:lnTo>
+                  <a:pt x="2458787" y="28480"/>
+                </a:lnTo>
+                <a:lnTo>
+                  <a:pt x="2495486" y="21708"/>
+                </a:lnTo>
+                <a:lnTo>
+                  <a:pt x="2532184" y="15815"/>
+                </a:lnTo>
+                <a:lnTo>
+                  <a:pt x="2568882" y="10823"/>
+                </a:lnTo>
+                <a:lnTo>
+                  <a:pt x="2605581" y="6755"/>
+                </a:lnTo>
+                <a:lnTo>
+                  <a:pt x="2642279" y="3627"/>
+                </a:lnTo>
+                <a:lnTo>
+                  <a:pt x="2678977" y="1453"/>
+                </a:lnTo>
+                <a:lnTo>
+                  <a:pt x="2715676" y="243"/>
+                </a:lnTo>
+                <a:lnTo>
+                  <a:pt x="2752374" y="0"/>
+                </a:lnTo>
+                <a:lnTo>
+                  <a:pt x="2789072" y="727"/>
+                </a:lnTo>
+                <a:lnTo>
+                  <a:pt x="2825771" y="2420"/>
+                </a:lnTo>
+                <a:lnTo>
+                  <a:pt x="2862469" y="5073"/>
+                </a:lnTo>
+                <a:lnTo>
+                  <a:pt x="2899167" y="8672"/>
+                </a:lnTo>
+                <a:lnTo>
+                  <a:pt x="2935866" y="13205"/>
+                </a:lnTo>
+                <a:lnTo>
+                  <a:pt x="2972564" y="18650"/>
+                </a:lnTo>
+                <a:lnTo>
+                  <a:pt x="3009262" y="24986"/>
+                </a:lnTo>
+                <a:lnTo>
+                  <a:pt x="3045961" y="32186"/>
+                </a:lnTo>
+                <a:lnTo>
+                  <a:pt x="3082659" y="40220"/>
+                </a:lnTo>
+                <a:lnTo>
+                  <a:pt x="3119357" y="49056"/>
+                </a:lnTo>
+                <a:lnTo>
+                  <a:pt x="3156056" y="58658"/>
+                </a:lnTo>
+                <a:lnTo>
+                  <a:pt x="3192754" y="68987"/>
+                </a:lnTo>
+                <a:lnTo>
+                  <a:pt x="3229452" y="80002"/>
+                </a:lnTo>
+                <a:lnTo>
+                  <a:pt x="3266151" y="91662"/>
+                </a:lnTo>
+                <a:lnTo>
+                  <a:pt x="3302849" y="103921"/>
+                </a:lnTo>
+                <a:lnTo>
+                  <a:pt x="3339547" y="116733"/>
+                </a:lnTo>
+                <a:lnTo>
+                  <a:pt x="3376246" y="130051"/>
+                </a:lnTo>
+                <a:lnTo>
+                  <a:pt x="3412944" y="143828"/>
+                </a:lnTo>
+                <a:lnTo>
+                  <a:pt x="3449642" y="158013"/>
+                </a:lnTo>
+                <a:lnTo>
+                  <a:pt x="3486341" y="172559"/>
+                </a:lnTo>
+                <a:lnTo>
+                  <a:pt x="3523039" y="187415"/>
+                </a:lnTo>
+                <a:lnTo>
+                  <a:pt x="3559737" y="202533"/>
+                </a:lnTo>
+                <a:lnTo>
+                  <a:pt x="3596436" y="217866"/>
+                </a:lnTo>
+                <a:lnTo>
+                  <a:pt x="3633134" y="233364"/>
+                </a:lnTo>
+                <a:lnTo>
+                  <a:pt x="3669832" y="248981"/>
+                </a:lnTo>
+                <a:lnTo>
+                  <a:pt x="3706531" y="264671"/>
+                </a:lnTo>
+                <a:lnTo>
+                  <a:pt x="3743229" y="280391"/>
+                </a:lnTo>
+                <a:lnTo>
+                  <a:pt x="3779927" y="296097"/>
+                </a:lnTo>
+                <a:lnTo>
+                  <a:pt x="3816626" y="311749"/>
+                </a:lnTo>
+                <a:lnTo>
+                  <a:pt x="3853324" y="327306"/>
+                </a:lnTo>
+                <a:lnTo>
+                  <a:pt x="3890022" y="342731"/>
+                </a:lnTo>
+                <a:lnTo>
+                  <a:pt x="3926721" y="357990"/>
+                </a:lnTo>
+                <a:lnTo>
+                  <a:pt x="3963419" y="373048"/>
+                </a:lnTo>
+                <a:lnTo>
+                  <a:pt x="4000117" y="387876"/>
+                </a:lnTo>
+                <a:lnTo>
+                  <a:pt x="4036816" y="402442"/>
+                </a:lnTo>
+                <a:lnTo>
+                  <a:pt x="4073514" y="416722"/>
+                </a:lnTo>
+                <a:lnTo>
+                  <a:pt x="4110212" y="430691"/>
+                </a:lnTo>
+                <a:lnTo>
+                  <a:pt x="4146911" y="444326"/>
+                </a:lnTo>
+                <a:lnTo>
+                  <a:pt x="4183609" y="457608"/>
+                </a:lnTo>
+                <a:lnTo>
+                  <a:pt x="4220307" y="470519"/>
+                </a:lnTo>
+                <a:lnTo>
+                  <a:pt x="4257006" y="483044"/>
+                </a:lnTo>
+                <a:lnTo>
+                  <a:pt x="4293704" y="495170"/>
+                </a:lnTo>
+                <a:lnTo>
+                  <a:pt x="4330402" y="506885"/>
+                </a:lnTo>
+                <a:lnTo>
+                  <a:pt x="4367101" y="518180"/>
+                </a:lnTo>
+                <a:lnTo>
+                  <a:pt x="4403799" y="529049"/>
+                </a:lnTo>
+                <a:lnTo>
+                  <a:pt x="4440497" y="539485"/>
+                </a:lnTo>
+                <a:lnTo>
+                  <a:pt x="4477195" y="549486"/>
+                </a:lnTo>
+                <a:lnTo>
+                  <a:pt x="4513894" y="559050"/>
+                </a:lnTo>
+                <a:lnTo>
+                  <a:pt x="4550592" y="568176"/>
+                </a:lnTo>
+                <a:lnTo>
+                  <a:pt x="4587290" y="576866"/>
+                </a:lnTo>
+                <a:lnTo>
+                  <a:pt x="4623989" y="585122"/>
+                </a:lnTo>
+                <a:lnTo>
+                  <a:pt x="4660687" y="592949"/>
+                </a:lnTo>
+                <a:lnTo>
+                  <a:pt x="4697385" y="600350"/>
+                </a:lnTo>
+                <a:lnTo>
+                  <a:pt x="4734084" y="607332"/>
+                </a:lnTo>
+                <a:lnTo>
+                  <a:pt x="4770782" y="613901"/>
+                </a:lnTo>
+                <a:lnTo>
+                  <a:pt x="4807480" y="620066"/>
+                </a:lnTo>
+                <a:lnTo>
+                  <a:pt x="4844179" y="625834"/>
+                </a:lnTo>
+                <a:lnTo>
+                  <a:pt x="4880877" y="631214"/>
+                </a:lnTo>
+                <a:lnTo>
+                  <a:pt x="4917575" y="636215"/>
+                </a:lnTo>
+                <a:lnTo>
+                  <a:pt x="4954274" y="640846"/>
+                </a:lnTo>
+                <a:lnTo>
+                  <a:pt x="4990972" y="645116"/>
+                </a:lnTo>
+                <a:lnTo>
+                  <a:pt x="5027670" y="649034"/>
+                </a:lnTo>
+                <a:lnTo>
+                  <a:pt x="5064369" y="652610"/>
+                </a:lnTo>
+                <a:lnTo>
+                  <a:pt x="5101067" y="655852"/>
+                </a:lnTo>
+                <a:lnTo>
+                  <a:pt x="5137765" y="658769"/>
+                </a:lnTo>
+                <a:lnTo>
+                  <a:pt x="5174464" y="661369"/>
+                </a:lnTo>
+                <a:lnTo>
+                  <a:pt x="5211162" y="663660"/>
+                </a:lnTo>
+                <a:lnTo>
+                  <a:pt x="5247860" y="665648"/>
+                </a:lnTo>
+                <a:lnTo>
+                  <a:pt x="5284559" y="667340"/>
+                </a:lnTo>
+                <a:lnTo>
+                  <a:pt x="5321257" y="668742"/>
+                </a:lnTo>
+                <a:lnTo>
+                  <a:pt x="5357955" y="669857"/>
+                </a:lnTo>
+                <a:lnTo>
+                  <a:pt x="5394654" y="670690"/>
+                </a:lnTo>
+                <a:lnTo>
+                  <a:pt x="5431352" y="671244"/>
+                </a:lnTo>
+                <a:lnTo>
+                  <a:pt x="5468050" y="671521"/>
+                </a:lnTo>
+                <a:lnTo>
+                  <a:pt x="5486400" y="671555"/>
+                </a:lnTo>
+              </a:path>
+            </a:pathLst>
+          </a:custGeom>
+          <a:noFill/>
+          <a:ln w="38100">
+            <a:solidFill>
+              <a:srgbClr val="8EDBD4"/>
+            </a:solidFill>
+          </a:ln>
+          <a:effectLst/>
+        </p:spPr>
+        <p:txBody>
+          <a:bodyPr rtlCol="0" anchor="ctr"/>
+          <a:lstStyle/>
+          <a:p>
+            <a:pPr algn="ctr"/>
+          </a:p>
+        </p:txBody>
+      </p:sp>
+      <p:sp>
+        <p:nvSpPr>
+          <p:cNvPr id="26" name="C3-E20 polygon 24" descr="sci-ppt:o024"/>
+          <p:cNvSpPr/>
+          <p:nvPr/>
+        </p:nvSpPr>
+        <p:spPr>
+          <a:xfrm>
+            <a:off x="914400" y="2335921"/>
+            <a:ext cx="5486400" cy="1298818"/>
+          </a:xfrm>
+          <a:custGeom>
+            <a:avLst/>
+            <a:gdLst/>
+            <a:ahLst/>
+            <a:cxnLst/>
+            <a:rect l="l" t="t" r="r" b="b"/>
+            <a:pathLst>
+              <a:path w="5486400" h="1298818">
+                <a:moveTo>
+                  <a:pt x="0" y="1298818"/>
+                </a:moveTo>
+                <a:lnTo>
+                  <a:pt x="36698" y="1298368"/>
+                </a:lnTo>
+                <a:lnTo>
+                  <a:pt x="73396" y="1297016"/>
+                </a:lnTo>
+                <a:lnTo>
+                  <a:pt x="110094" y="1294765"/>
+                </a:lnTo>
+                <a:lnTo>
+                  <a:pt x="146793" y="1291614"/>
+                </a:lnTo>
+                <a:lnTo>
+                  <a:pt x="183491" y="1287567"/>
+                </a:lnTo>
+                <a:lnTo>
+                  <a:pt x="220189" y="1282626"/>
+                </a:lnTo>
+                <a:lnTo>
+                  <a:pt x="256888" y="1276794"/>
+                </a:lnTo>
+                <a:lnTo>
+                  <a:pt x="293586" y="1270075"/>
+                </a:lnTo>
+                <a:lnTo>
+                  <a:pt x="330284" y="1262473"/>
+                </a:lnTo>
+                <a:lnTo>
+                  <a:pt x="366983" y="1253994"/>
+                </a:lnTo>
+                <a:lnTo>
+                  <a:pt x="403681" y="1244644"/>
+                </a:lnTo>
+                <a:lnTo>
+                  <a:pt x="440379" y="1234429"/>
+                </a:lnTo>
+                <a:lnTo>
+                  <a:pt x="477078" y="1223356"/>
+                </a:lnTo>
+                <a:lnTo>
+                  <a:pt x="513776" y="1211434"/>
+                </a:lnTo>
+                <a:lnTo>
+                  <a:pt x="550474" y="1198672"/>
+                </a:lnTo>
+                <a:lnTo>
+                  <a:pt x="587173" y="1185080"/>
+                </a:lnTo>
+                <a:lnTo>
+                  <a:pt x="623871" y="1170668"/>
+                </a:lnTo>
+                <a:lnTo>
+                  <a:pt x="660569" y="1155448"/>
+                </a:lnTo>
+                <a:lnTo>
+                  <a:pt x="697268" y="1139433"/>
+                </a:lnTo>
+                <a:lnTo>
+                  <a:pt x="733966" y="1122638"/>
+                </a:lnTo>
+                <a:lnTo>
+                  <a:pt x="770664" y="1105076"/>
+                </a:lnTo>
+                <a:lnTo>
+                  <a:pt x="807363" y="1086765"/>
+                </a:lnTo>
+                <a:lnTo>
+                  <a:pt x="844061" y="1067721"/>
+                </a:lnTo>
+                <a:lnTo>
+                  <a:pt x="880759" y="1047964"/>
+                </a:lnTo>
+                <a:lnTo>
+                  <a:pt x="917458" y="1027513"/>
+                </a:lnTo>
+                <a:lnTo>
+                  <a:pt x="954156" y="1006390"/>
+                </a:lnTo>
+                <a:lnTo>
+                  <a:pt x="990854" y="984618"/>
+                </a:lnTo>
+                <a:lnTo>
+                  <a:pt x="1027553" y="962222"/>
+                </a:lnTo>
+                <a:lnTo>
+                  <a:pt x="1064251" y="939226"/>
+                </a:lnTo>
+                <a:lnTo>
+                  <a:pt x="1100949" y="915660"/>
+                </a:lnTo>
+                <a:lnTo>
+                  <a:pt x="1137648" y="891552"/>
+                </a:lnTo>
+                <a:lnTo>
+                  <a:pt x="1174346" y="866934"/>
+                </a:lnTo>
+                <a:lnTo>
+                  <a:pt x="1211044" y="841837"/>
+                </a:lnTo>
+                <a:lnTo>
+                  <a:pt x="1247743" y="816297"/>
+                </a:lnTo>
+                <a:lnTo>
+                  <a:pt x="1284441" y="790349"/>
+                </a:lnTo>
+                <a:lnTo>
+                  <a:pt x="1321139" y="764033"/>
+                </a:lnTo>
+                <a:lnTo>
+                  <a:pt x="1357838" y="737387"/>
+                </a:lnTo>
+                <a:lnTo>
+                  <a:pt x="1394536" y="710454"/>
+                </a:lnTo>
+                <a:lnTo>
+                  <a:pt x="1431234" y="683277"/>
+                </a:lnTo>
+                <a:lnTo>
+                  <a:pt x="1467933" y="655902"/>
+                </a:lnTo>
+                <a:lnTo>
+                  <a:pt x="1504631" y="628376"/>
+                </a:lnTo>
+                <a:lnTo>
+                  <a:pt x="1541329" y="600748"/>
+                </a:lnTo>
+                <a:lnTo>
+                  <a:pt x="1578028" y="573069"/>
+                </a:lnTo>
+                <a:lnTo>
+                  <a:pt x="1614726" y="545391"/>
+                </a:lnTo>
+                <a:lnTo>
+                  <a:pt x="1651424" y="517768"/>
+                </a:lnTo>
+                <a:lnTo>
+                  <a:pt x="1688123" y="490255"/>
+                </a:lnTo>
+                <a:lnTo>
+                  <a:pt x="1724821" y="462910"/>
+                </a:lnTo>
+                <a:lnTo>
+                  <a:pt x="1761519" y="435790"/>
+                </a:lnTo>
+                <a:lnTo>
+                  <a:pt x="1798218" y="408953"/>
+                </a:lnTo>
+                <a:lnTo>
+                  <a:pt x="1834916" y="382462"/>
+                </a:lnTo>
+                <a:lnTo>
+                  <a:pt x="1871614" y="356375"/>
+                </a:lnTo>
+                <a:lnTo>
+                  <a:pt x="1908313" y="330754"/>
+                </a:lnTo>
+                <a:lnTo>
+                  <a:pt x="1945011" y="305661"/>
+                </a:lnTo>
+                <a:lnTo>
+                  <a:pt x="1981709" y="281159"/>
+                </a:lnTo>
+                <a:lnTo>
+                  <a:pt x="2018408" y="257307"/>
+                </a:lnTo>
+                <a:lnTo>
+                  <a:pt x="2055106" y="234169"/>
+                </a:lnTo>
+                <a:lnTo>
+                  <a:pt x="2091804" y="211804"/>
+                </a:lnTo>
+                <a:lnTo>
+                  <a:pt x="2128503" y="190273"/>
+                </a:lnTo>
+                <a:lnTo>
+                  <a:pt x="2165201" y="169635"/>
+                </a:lnTo>
+                <a:lnTo>
+                  <a:pt x="2201899" y="149946"/>
+                </a:lnTo>
+                <a:lnTo>
+                  <a:pt x="2238597" y="131263"/>
+                </a:lnTo>
+                <a:lnTo>
+                  <a:pt x="2275296" y="113638"/>
+                </a:lnTo>
+                <a:lnTo>
+                  <a:pt x="2311994" y="97124"/>
+                </a:lnTo>
+                <a:lnTo>
+                  <a:pt x="2348692" y="81770"/>
+                </a:lnTo>
+                <a:lnTo>
+                  <a:pt x="2385391" y="67620"/>
+                </a:lnTo>
+                <a:lnTo>
+                  <a:pt x="2422089" y="54718"/>
+                </a:lnTo>
+                <a:lnTo>
+                  <a:pt x="2458787" y="43104"/>
+                </a:lnTo>
+                <a:lnTo>
+                  <a:pt x="2495486" y="32813"/>
+                </a:lnTo>
+                <a:lnTo>
+                  <a:pt x="2532184" y="23878"/>
+                </a:lnTo>
+                <a:lnTo>
+                  <a:pt x="2568882" y="16326"/>
+                </a:lnTo>
+                <a:lnTo>
+                  <a:pt x="2605581" y="10182"/>
+                </a:lnTo>
+                <a:lnTo>
+                  <a:pt x="2642279" y="5464"/>
+                </a:lnTo>
+                <a:lnTo>
+                  <a:pt x="2678977" y="2189"/>
+                </a:lnTo>
+                <a:lnTo>
+                  <a:pt x="2715676" y="365"/>
+                </a:lnTo>
+                <a:lnTo>
+                  <a:pt x="2752374" y="0"/>
+                </a:lnTo>
+                <a:lnTo>
+                  <a:pt x="2789072" y="1095"/>
+                </a:lnTo>
+                <a:lnTo>
+                  <a:pt x="2825771" y="3645"/>
+                </a:lnTo>
+                <a:lnTo>
+                  <a:pt x="2862469" y="7644"/>
+                </a:lnTo>
+                <a:lnTo>
+                  <a:pt x="2899167" y="13077"/>
+                </a:lnTo>
+                <a:lnTo>
+                  <a:pt x="2935866" y="19928"/>
+                </a:lnTo>
+                <a:lnTo>
+                  <a:pt x="2972564" y="28174"/>
+                </a:lnTo>
+                <a:lnTo>
+                  <a:pt x="3009262" y="37791"/>
+                </a:lnTo>
+                <a:lnTo>
+                  <a:pt x="3045961" y="48748"/>
+                </a:lnTo>
+                <a:lnTo>
+                  <a:pt x="3082659" y="61011"/>
+                </a:lnTo>
+                <a:lnTo>
+                  <a:pt x="3119357" y="74541"/>
+                </a:lnTo>
+                <a:lnTo>
+                  <a:pt x="3156056" y="89299"/>
+                </a:lnTo>
+                <a:lnTo>
+                  <a:pt x="3192754" y="105239"/>
+                </a:lnTo>
+                <a:lnTo>
+                  <a:pt x="3229452" y="122315"/>
+                </a:lnTo>
+                <a:lnTo>
+                  <a:pt x="3266151" y="140475"/>
+                </a:lnTo>
+                <a:lnTo>
+                  <a:pt x="3302849" y="159668"/>
+                </a:lnTo>
+                <a:lnTo>
+                  <a:pt x="3339547" y="179839"/>
+                </a:lnTo>
+                <a:lnTo>
+                  <a:pt x="3376246" y="200931"/>
+                </a:lnTo>
+                <a:lnTo>
+                  <a:pt x="3412944" y="222886"/>
+                </a:lnTo>
+                <a:lnTo>
+                  <a:pt x="3449642" y="245645"/>
+                </a:lnTo>
+                <a:lnTo>
+                  <a:pt x="3486341" y="269148"/>
+                </a:lnTo>
+                <a:lnTo>
+                  <a:pt x="3523039" y="293332"/>
+                </a:lnTo>
+                <a:lnTo>
+                  <a:pt x="3559737" y="318138"/>
+                </a:lnTo>
+                <a:lnTo>
+                  <a:pt x="3596436" y="343502"/>
+                </a:lnTo>
+                <a:lnTo>
+                  <a:pt x="3633134" y="369364"/>
+                </a:lnTo>
+                <a:lnTo>
+                  <a:pt x="3669832" y="395661"/>
+                </a:lnTo>
+                <a:lnTo>
+                  <a:pt x="3706531" y="422332"/>
+                </a:lnTo>
+                <a:lnTo>
+                  <a:pt x="3743229" y="449318"/>
+                </a:lnTo>
+                <a:lnTo>
+                  <a:pt x="3779927" y="476558"/>
+                </a:lnTo>
+                <a:lnTo>
+                  <a:pt x="3816626" y="503994"/>
+                </a:lnTo>
+                <a:lnTo>
+                  <a:pt x="3853324" y="531569"/>
+                </a:lnTo>
+                <a:lnTo>
+                  <a:pt x="3890022" y="559227"/>
+                </a:lnTo>
+                <a:lnTo>
+                  <a:pt x="3926721" y="586912"/>
+                </a:lnTo>
+                <a:lnTo>
+                  <a:pt x="3963419" y="614572"/>
+                </a:lnTo>
+                <a:lnTo>
+                  <a:pt x="4000117" y="642155"/>
+                </a:lnTo>
+                <a:lnTo>
+                  <a:pt x="4036816" y="669612"/>
+                </a:lnTo>
+                <a:lnTo>
+                  <a:pt x="4073514" y="696893"/>
+                </a:lnTo>
+                <a:lnTo>
+                  <a:pt x="4110212" y="723954"/>
+                </a:lnTo>
+                <a:lnTo>
+                  <a:pt x="4146911" y="750748"/>
+                </a:lnTo>
+                <a:lnTo>
+                  <a:pt x="4183609" y="777235"/>
+                </a:lnTo>
+                <a:lnTo>
+                  <a:pt x="4220307" y="803372"/>
+                </a:lnTo>
+                <a:lnTo>
+                  <a:pt x="4257006" y="829120"/>
+                </a:lnTo>
+                <a:lnTo>
+                  <a:pt x="4293704" y="854443"/>
+                </a:lnTo>
+                <a:lnTo>
+                  <a:pt x="4330402" y="879305"/>
+                </a:lnTo>
+                <a:lnTo>
+                  <a:pt x="4367101" y="903672"/>
+                </a:lnTo>
+                <a:lnTo>
+                  <a:pt x="4403799" y="927513"/>
+                </a:lnTo>
+                <a:lnTo>
+                  <a:pt x="4440497" y="950797"/>
+                </a:lnTo>
+                <a:lnTo>
+                  <a:pt x="4477195" y="973496"/>
+                </a:lnTo>
+                <a:lnTo>
+                  <a:pt x="4513894" y="995584"/>
+                </a:lnTo>
+                <a:lnTo>
+                  <a:pt x="4550592" y="1017034"/>
+                </a:lnTo>
+                <a:lnTo>
+                  <a:pt x="4587290" y="1037824"/>
+                </a:lnTo>
+                <a:lnTo>
+                  <a:pt x="4623989" y="1057930"/>
+                </a:lnTo>
+                <a:lnTo>
+                  <a:pt x="4660687" y="1077333"/>
+                </a:lnTo>
+                <a:lnTo>
+                  <a:pt x="4697385" y="1096013"/>
+                </a:lnTo>
+                <a:lnTo>
+                  <a:pt x="4734084" y="1113952"/>
+                </a:lnTo>
+                <a:lnTo>
+                  <a:pt x="4770782" y="1131132"/>
+                </a:lnTo>
+                <a:lnTo>
+                  <a:pt x="4807480" y="1147539"/>
+                </a:lnTo>
+                <a:lnTo>
+                  <a:pt x="4844179" y="1163158"/>
+                </a:lnTo>
+                <a:lnTo>
+                  <a:pt x="4880877" y="1177976"/>
+                </a:lnTo>
+                <a:lnTo>
+                  <a:pt x="4917575" y="1191979"/>
+                </a:lnTo>
+                <a:lnTo>
+                  <a:pt x="4954274" y="1205158"/>
+                </a:lnTo>
+                <a:lnTo>
+                  <a:pt x="4990972" y="1217501"/>
+                </a:lnTo>
+                <a:lnTo>
+                  <a:pt x="5027670" y="1228999"/>
+                </a:lnTo>
+                <a:lnTo>
+                  <a:pt x="5064369" y="1239644"/>
+                </a:lnTo>
+                <a:lnTo>
+                  <a:pt x="5101067" y="1249428"/>
+                </a:lnTo>
+                <a:lnTo>
+                  <a:pt x="5137765" y="1258343"/>
+                </a:lnTo>
+                <a:lnTo>
+                  <a:pt x="5174464" y="1266384"/>
+                </a:lnTo>
+                <a:lnTo>
+                  <a:pt x="5211162" y="1273545"/>
+                </a:lnTo>
+                <a:lnTo>
+                  <a:pt x="5247860" y="1279821"/>
+                </a:lnTo>
+                <a:lnTo>
+                  <a:pt x="5284559" y="1285208"/>
+                </a:lnTo>
+                <a:lnTo>
+                  <a:pt x="5321257" y="1289702"/>
+                </a:lnTo>
+                <a:lnTo>
+                  <a:pt x="5357955" y="1293302"/>
+                </a:lnTo>
+                <a:lnTo>
+                  <a:pt x="5394654" y="1296003"/>
+                </a:lnTo>
+                <a:lnTo>
+                  <a:pt x="5431352" y="1297805"/>
+                </a:lnTo>
+                <a:lnTo>
+                  <a:pt x="5468050" y="1298706"/>
+                </a:lnTo>
+                <a:lnTo>
+                  <a:pt x="5486400" y="1298818"/>
+                </a:lnTo>
+              </a:path>
+            </a:pathLst>
+          </a:custGeom>
+          <a:noFill/>
+          <a:ln w="22860">
+            <a:solidFill>
+              <a:srgbClr val="B4C7D2"/>
+            </a:solidFill>
+            <a:prstDash val="dash"/>
+          </a:ln>
+          <a:effectLst/>
+        </p:spPr>
+        <p:txBody>
+          <a:bodyPr rtlCol="0" anchor="ctr"/>
+          <a:lstStyle/>
+          <a:p>
+            <a:pPr algn="ctr"/>
+          </a:p>
+        </p:txBody>
+      </p:sp>
+      <p:sp>
+        <p:nvSpPr>
+          <p:cNvPr id="27" name="C3-E20 polygon 25" descr="sci-ppt:o025"/>
+          <p:cNvSpPr/>
+          <p:nvPr/>
+        </p:nvSpPr>
+        <p:spPr>
+          <a:xfrm>
+            <a:off x="914400" y="3063239"/>
+            <a:ext cx="5486400" cy="0"/>
+          </a:xfrm>
+          <a:custGeom>
+            <a:avLst/>
+            <a:gdLst/>
+            <a:ahLst/>
+            <a:cxnLst/>
+            <a:rect l="l" t="t" r="r" b="b"/>
+            <a:pathLst>
+              <a:path w="5486400" h="0">
+                <a:moveTo>
+                  <a:pt x="0" y="0"/>
+                </a:moveTo>
+                <a:lnTo>
+                  <a:pt x="36698" y="0"/>
+                </a:lnTo>
+                <a:lnTo>
+                  <a:pt x="73396" y="0"/>
+                </a:lnTo>
+                <a:lnTo>
+                  <a:pt x="110094" y="0"/>
+                </a:lnTo>
+                <a:lnTo>
+                  <a:pt x="146793" y="0"/>
+                </a:lnTo>
+                <a:lnTo>
+                  <a:pt x="183491" y="0"/>
+                </a:lnTo>
+                <a:lnTo>
+                  <a:pt x="220189" y="0"/>
+                </a:lnTo>
+                <a:lnTo>
+                  <a:pt x="256888" y="0"/>
+                </a:lnTo>
+                <a:lnTo>
+                  <a:pt x="293586" y="0"/>
+                </a:lnTo>
+                <a:lnTo>
+                  <a:pt x="330284" y="0"/>
+                </a:lnTo>
+                <a:lnTo>
+                  <a:pt x="366983" y="0"/>
+                </a:lnTo>
+                <a:lnTo>
+                  <a:pt x="403681" y="0"/>
+                </a:lnTo>
+                <a:lnTo>
+                  <a:pt x="440379" y="0"/>
+                </a:lnTo>
+                <a:lnTo>
+                  <a:pt x="477078" y="0"/>
+                </a:lnTo>
+                <a:lnTo>
+                  <a:pt x="513776" y="0"/>
+                </a:lnTo>
+                <a:lnTo>
+                  <a:pt x="550474" y="0"/>
+                </a:lnTo>
+                <a:lnTo>
+                  <a:pt x="587173" y="0"/>
+                </a:lnTo>
+                <a:lnTo>
+                  <a:pt x="623871" y="0"/>
+                </a:lnTo>
+                <a:lnTo>
+                  <a:pt x="660569" y="0"/>
+                </a:lnTo>
+                <a:lnTo>
+                  <a:pt x="697268" y="0"/>
+                </a:lnTo>
+                <a:lnTo>
+                  <a:pt x="733966" y="0"/>
+                </a:lnTo>
+                <a:lnTo>
+                  <a:pt x="770664" y="0"/>
+                </a:lnTo>
+                <a:lnTo>
+                  <a:pt x="807363" y="0"/>
+                </a:lnTo>
+                <a:lnTo>
+                  <a:pt x="844061" y="0"/>
+                </a:lnTo>
+                <a:lnTo>
+                  <a:pt x="880759" y="0"/>
+                </a:lnTo>
+                <a:lnTo>
+                  <a:pt x="917458" y="0"/>
+                </a:lnTo>
+                <a:lnTo>
+                  <a:pt x="954156" y="0"/>
+                </a:lnTo>
+                <a:lnTo>
+                  <a:pt x="990854" y="0"/>
+                </a:lnTo>
+                <a:lnTo>
+                  <a:pt x="1027553" y="0"/>
+                </a:lnTo>
+                <a:lnTo>
+                  <a:pt x="1064251" y="0"/>
+                </a:lnTo>
+                <a:lnTo>
+                  <a:pt x="1100949" y="0"/>
+                </a:lnTo>
+                <a:lnTo>
+                  <a:pt x="1137648" y="0"/>
+                </a:lnTo>
+                <a:lnTo>
+                  <a:pt x="1174346" y="0"/>
+                </a:lnTo>
+                <a:lnTo>
+                  <a:pt x="1211044" y="0"/>
+                </a:lnTo>
+                <a:lnTo>
+                  <a:pt x="1247743" y="0"/>
+                </a:lnTo>
+                <a:lnTo>
+                  <a:pt x="1284441" y="0"/>
+                </a:lnTo>
+                <a:lnTo>
+                  <a:pt x="1321139" y="0"/>
+                </a:lnTo>
+                <a:lnTo>
+                  <a:pt x="1357838" y="0"/>
+                </a:lnTo>
+                <a:lnTo>
+                  <a:pt x="1394536" y="0"/>
+                </a:lnTo>
+                <a:lnTo>
+                  <a:pt x="1431234" y="0"/>
+                </a:lnTo>
+                <a:lnTo>
+                  <a:pt x="1467933" y="0"/>
+                </a:lnTo>
+                <a:lnTo>
+                  <a:pt x="1504631" y="0"/>
+                </a:lnTo>
+                <a:lnTo>
+                  <a:pt x="1541329" y="0"/>
+                </a:lnTo>
+                <a:lnTo>
+                  <a:pt x="1578028" y="0"/>
+                </a:lnTo>
+                <a:lnTo>
+                  <a:pt x="1614726" y="0"/>
+                </a:lnTo>
+                <a:lnTo>
+                  <a:pt x="1651424" y="0"/>
+                </a:lnTo>
+                <a:lnTo>
+                  <a:pt x="1688123" y="0"/>
+                </a:lnTo>
+                <a:lnTo>
+                  <a:pt x="1724821" y="0"/>
+                </a:lnTo>
+                <a:lnTo>
+                  <a:pt x="1761519" y="0"/>
+                </a:lnTo>
+                <a:lnTo>
+                  <a:pt x="1798218" y="0"/>
+                </a:lnTo>
+                <a:lnTo>
+                  <a:pt x="1834916" y="0"/>
+                </a:lnTo>
+                <a:lnTo>
+                  <a:pt x="1871614" y="0"/>
+                </a:lnTo>
+                <a:lnTo>
+                  <a:pt x="1908313" y="0"/>
+                </a:lnTo>
+                <a:lnTo>
+                  <a:pt x="1945011" y="0"/>
+                </a:lnTo>
+                <a:lnTo>
+                  <a:pt x="1981709" y="0"/>
+                </a:lnTo>
+                <a:lnTo>
+                  <a:pt x="2018408" y="0"/>
+                </a:lnTo>
+                <a:lnTo>
+                  <a:pt x="2055106" y="0"/>
+                </a:lnTo>
+                <a:lnTo>
+                  <a:pt x="2091804" y="0"/>
+                </a:lnTo>
+                <a:lnTo>
+                  <a:pt x="2128503" y="0"/>
+                </a:lnTo>
+                <a:lnTo>
+                  <a:pt x="2165201" y="0"/>
+                </a:lnTo>
+                <a:lnTo>
+                  <a:pt x="2201899" y="0"/>
+                </a:lnTo>
+                <a:lnTo>
+                  <a:pt x="2238597" y="0"/>
+                </a:lnTo>
+                <a:lnTo>
+                  <a:pt x="2275296" y="0"/>
+                </a:lnTo>
+                <a:lnTo>
+                  <a:pt x="2311994" y="0"/>
+                </a:lnTo>
+                <a:lnTo>
+                  <a:pt x="2348692" y="0"/>
+                </a:lnTo>
+                <a:lnTo>
+                  <a:pt x="2385391" y="0"/>
+                </a:lnTo>
+                <a:lnTo>
+                  <a:pt x="2422089" y="0"/>
+                </a:lnTo>
+                <a:lnTo>
+                  <a:pt x="2458787" y="0"/>
+                </a:lnTo>
+                <a:lnTo>
+                  <a:pt x="2495486" y="0"/>
+                </a:lnTo>
+                <a:lnTo>
+                  <a:pt x="2532184" y="0"/>
+                </a:lnTo>
+                <a:lnTo>
+                  <a:pt x="2568882" y="0"/>
+                </a:lnTo>
+                <a:lnTo>
+                  <a:pt x="2605581" y="0"/>
+                </a:lnTo>
+                <a:lnTo>
+                  <a:pt x="2642279" y="0"/>
+                </a:lnTo>
+                <a:lnTo>
+                  <a:pt x="2678977" y="0"/>
+                </a:lnTo>
+                <a:lnTo>
+                  <a:pt x="2715676" y="0"/>
+                </a:lnTo>
+                <a:lnTo>
+                  <a:pt x="2752374" y="0"/>
+                </a:lnTo>
+                <a:lnTo>
+                  <a:pt x="2789072" y="0"/>
+                </a:lnTo>
+                <a:lnTo>
+                  <a:pt x="2825771" y="0"/>
+                </a:lnTo>
+                <a:lnTo>
+                  <a:pt x="2862469" y="0"/>
+                </a:lnTo>
+                <a:lnTo>
+                  <a:pt x="2899167" y="0"/>
+                </a:lnTo>
+                <a:lnTo>
+                  <a:pt x="2935866" y="0"/>
+                </a:lnTo>
+                <a:lnTo>
+                  <a:pt x="2972564" y="0"/>
+                </a:lnTo>
+                <a:lnTo>
+                  <a:pt x="3009262" y="0"/>
+                </a:lnTo>
+                <a:lnTo>
+                  <a:pt x="3045961" y="0"/>
+                </a:lnTo>
+                <a:lnTo>
+                  <a:pt x="3082659" y="0"/>
+                </a:lnTo>
+                <a:lnTo>
+                  <a:pt x="3119357" y="0"/>
+                </a:lnTo>
+                <a:lnTo>
+                  <a:pt x="3156056" y="0"/>
+                </a:lnTo>
+                <a:lnTo>
+                  <a:pt x="3192754" y="0"/>
+                </a:lnTo>
+                <a:lnTo>
+                  <a:pt x="3229452" y="0"/>
+                </a:lnTo>
+                <a:lnTo>
+                  <a:pt x="3266151" y="0"/>
+                </a:lnTo>
+                <a:lnTo>
+                  <a:pt x="3302849" y="0"/>
+                </a:lnTo>
+                <a:lnTo>
+                  <a:pt x="3339547" y="0"/>
+                </a:lnTo>
+                <a:lnTo>
+                  <a:pt x="3376246" y="0"/>
+                </a:lnTo>
+                <a:lnTo>
+                  <a:pt x="3412944" y="0"/>
+                </a:lnTo>
+                <a:lnTo>
+                  <a:pt x="3449642" y="0"/>
+                </a:lnTo>
+                <a:lnTo>
+                  <a:pt x="3486341" y="0"/>
+                </a:lnTo>
+                <a:lnTo>
+                  <a:pt x="3523039" y="0"/>
+                </a:lnTo>
+                <a:lnTo>
+                  <a:pt x="3559737" y="0"/>
+                </a:lnTo>
+                <a:lnTo>
+                  <a:pt x="3596436" y="0"/>
+                </a:lnTo>
+                <a:lnTo>
+                  <a:pt x="3633134" y="0"/>
+                </a:lnTo>
+                <a:lnTo>
+                  <a:pt x="3669832" y="0"/>
+                </a:lnTo>
+                <a:lnTo>
+                  <a:pt x="3706531" y="0"/>
+                </a:lnTo>
+                <a:lnTo>
+                  <a:pt x="3743229" y="0"/>
+                </a:lnTo>
+                <a:lnTo>
+                  <a:pt x="3779927" y="0"/>
+                </a:lnTo>
+                <a:lnTo>
+                  <a:pt x="3816626" y="0"/>
+                </a:lnTo>
+                <a:lnTo>
+                  <a:pt x="3853324" y="0"/>
+                </a:lnTo>
+                <a:lnTo>
+                  <a:pt x="3890022" y="0"/>
+                </a:lnTo>
+                <a:lnTo>
+                  <a:pt x="3926721" y="0"/>
+                </a:lnTo>
+                <a:lnTo>
+                  <a:pt x="3963419" y="0"/>
+                </a:lnTo>
+                <a:lnTo>
+                  <a:pt x="4000117" y="0"/>
+                </a:lnTo>
+                <a:lnTo>
+                  <a:pt x="4036816" y="0"/>
+                </a:lnTo>
+                <a:lnTo>
+                  <a:pt x="4073514" y="0"/>
+                </a:lnTo>
+                <a:lnTo>
+                  <a:pt x="4110212" y="0"/>
+                </a:lnTo>
+                <a:lnTo>
+                  <a:pt x="4146911" y="0"/>
+                </a:lnTo>
+                <a:lnTo>
+                  <a:pt x="4183609" y="0"/>
+                </a:lnTo>
+                <a:lnTo>
+                  <a:pt x="4220307" y="0"/>
+                </a:lnTo>
+                <a:lnTo>
+                  <a:pt x="4257006" y="0"/>
+                </a:lnTo>
+                <a:lnTo>
+                  <a:pt x="4293704" y="0"/>
+                </a:lnTo>
+                <a:lnTo>
+                  <a:pt x="4330402" y="0"/>
+                </a:lnTo>
+                <a:lnTo>
+                  <a:pt x="4367101" y="0"/>
+                </a:lnTo>
+                <a:lnTo>
+                  <a:pt x="4403799" y="0"/>
+                </a:lnTo>
+                <a:lnTo>
+                  <a:pt x="4440497" y="0"/>
+                </a:lnTo>
+                <a:lnTo>
+                  <a:pt x="4477195" y="0"/>
+                </a:lnTo>
+                <a:lnTo>
+                  <a:pt x="4513894" y="0"/>
+                </a:lnTo>
+                <a:lnTo>
+                  <a:pt x="4550592" y="0"/>
+                </a:lnTo>
+                <a:lnTo>
+                  <a:pt x="4587290" y="0"/>
+                </a:lnTo>
+                <a:lnTo>
+                  <a:pt x="4623989" y="0"/>
+                </a:lnTo>
+                <a:lnTo>
+                  <a:pt x="4660687" y="0"/>
+                </a:lnTo>
+                <a:lnTo>
+                  <a:pt x="4697385" y="0"/>
+                </a:lnTo>
+                <a:lnTo>
+                  <a:pt x="4734084" y="0"/>
+                </a:lnTo>
+                <a:lnTo>
+                  <a:pt x="4770782" y="0"/>
+                </a:lnTo>
+                <a:lnTo>
+                  <a:pt x="4807480" y="0"/>
+                </a:lnTo>
+                <a:lnTo>
+                  <a:pt x="4844179" y="0"/>
+                </a:lnTo>
+                <a:lnTo>
+                  <a:pt x="4880877" y="0"/>
+                </a:lnTo>
+                <a:lnTo>
+                  <a:pt x="4917575" y="0"/>
+                </a:lnTo>
+                <a:lnTo>
+                  <a:pt x="4954274" y="0"/>
+                </a:lnTo>
+                <a:lnTo>
+                  <a:pt x="4990972" y="0"/>
+                </a:lnTo>
+                <a:lnTo>
+                  <a:pt x="5027670" y="0"/>
+                </a:lnTo>
+                <a:lnTo>
+                  <a:pt x="5064369" y="0"/>
+                </a:lnTo>
+                <a:lnTo>
+                  <a:pt x="5101067" y="0"/>
+                </a:lnTo>
+                <a:lnTo>
+                  <a:pt x="5137765" y="0"/>
+                </a:lnTo>
+                <a:lnTo>
+                  <a:pt x="5174464" y="0"/>
+                </a:lnTo>
+                <a:lnTo>
+                  <a:pt x="5211162" y="0"/>
+                </a:lnTo>
+                <a:lnTo>
+                  <a:pt x="5247860" y="0"/>
+                </a:lnTo>
+                <a:lnTo>
+                  <a:pt x="5284559" y="0"/>
+                </a:lnTo>
+                <a:lnTo>
+                  <a:pt x="5321257" y="0"/>
+                </a:lnTo>
+                <a:lnTo>
+                  <a:pt x="5357955" y="0"/>
+                </a:lnTo>
+                <a:lnTo>
+                  <a:pt x="5394654" y="0"/>
+                </a:lnTo>
+                <a:lnTo>
+                  <a:pt x="5431352" y="0"/>
+                </a:lnTo>
+                <a:lnTo>
+                  <a:pt x="5468050" y="0"/>
+                </a:lnTo>
+                <a:lnTo>
+                  <a:pt x="5486400" y="0"/>
+                </a:lnTo>
+              </a:path>
+            </a:pathLst>
+          </a:custGeom>
+          <a:noFill/>
+          <a:ln w="15240">
+            <a:solidFill>
+              <a:srgbClr val="2E4756"/>
+            </a:solidFill>
+          </a:ln>
+          <a:effectLst/>
+        </p:spPr>
+        <p:txBody>
+          <a:bodyPr rtlCol="0" anchor="ctr"/>
+          <a:lstStyle/>
+          <a:p>
+            <a:pPr algn="ctr"/>
+          </a:p>
+        </p:txBody>
+      </p:sp>
+      <p:sp>
+        <p:nvSpPr>
+          <p:cNvPr id="28" name="C3-E20 text 26" descr="sci-ppt:o026"/>
+          <p:cNvSpPr txBox="1"/>
+          <p:nvPr/>
+        </p:nvSpPr>
+        <p:spPr>
+          <a:xfrm>
+            <a:off x="1249508" y="1577339"/>
+            <a:ext cx="4937760" cy="216153"/>
+          </a:xfrm>
+          <a:prstGeom prst="rect">
+            <a:avLst/>
+          </a:prstGeom>
+          <a:noFill/>
+          <a:effectLst/>
+        </p:spPr>
+        <p:txBody>
+          <a:bodyPr wrap="none" lIns="18288" rIns="18288" tIns="18288" bIns="18288" anchor="t">
+            <a:spAutoFit/>
+          </a:bodyPr>
+          <a:lstStyle/>
+          <a:p>
+            <a:pPr algn="l">
+              <a:spcAft>
+                <a:spcPts val="0"/>
+              </a:spcAft>
+            </a:pPr>
+            <a:r>
+              <a:rPr sz="1100" b="0" i="0">
+                <a:solidFill>
+                  <a:srgbClr val="8EDBD4"/>
+                </a:solidFill>
+                <a:latin typeface="Arial"/>
+              </a:rPr>
+              <a:t>κ(z) of Eq. C3-E20 for a = a₀(1 + 0.12 cos kz), k a₀ = 0.7</a:t>
+            </a:r>
+          </a:p>
+        </p:txBody>
+      </p:sp>
+      <p:sp>
+        <p:nvSpPr>
+          <p:cNvPr id="29" name="C3-E20 text 27" descr="sci-ppt:o027"/>
+          <p:cNvSpPr txBox="1"/>
+          <p:nvPr/>
+        </p:nvSpPr>
+        <p:spPr>
+          <a:xfrm>
+            <a:off x="3956390" y="4251959"/>
+            <a:ext cx="2011680" cy="223900"/>
+          </a:xfrm>
+          <a:prstGeom prst="rect">
+            <a:avLst/>
+          </a:prstGeom>
+          <a:noFill/>
+          <a:effectLst/>
+        </p:spPr>
+        <p:txBody>
+          <a:bodyPr wrap="none" lIns="18288" rIns="18288" tIns="18288" bIns="18288" anchor="t">
             <a:spAutoFit/>
           </a:bodyPr>
           <a:lstStyle/>
@@ -3487,21 +5313,21 @@
                 </a:solidFill>
                 <a:latin typeface="Arial"/>
               </a:rPr>
-              <a:t>• a(z,t), A jet section</a:t>
-            </a:r>
-          </a:p>
-        </p:txBody>
-      </p:sp>
-      <p:sp>
-        <p:nvSpPr>
-          <p:cNvPr id="13" name="C3-E20 text 11" descr="sci-ppt:o011"/>
+              <a:t>dashed: 1/a alone</a:t>
+            </a:r>
+          </a:p>
+        </p:txBody>
+      </p:sp>
+      <p:sp>
+        <p:nvSpPr>
+          <p:cNvPr id="30" name="C3-E20 text 28" descr="sci-ppt:o028"/>
           <p:cNvSpPr txBox="1"/>
           <p:nvPr/>
         </p:nvSpPr>
         <p:spPr>
           <a:xfrm>
-            <a:off x="6217920" y="4096512"/>
-            <a:ext cx="5715000" cy="246888"/>
+            <a:off x="914400" y="1005840"/>
+            <a:ext cx="5486400" cy="254889"/>
           </a:xfrm>
           <a:prstGeom prst="rect">
             <a:avLst/>
@@ -3510,7 +5336,543 @@
           <a:effectLst/>
         </p:spPr>
         <p:txBody>
-          <a:bodyPr wrap="square" lIns="27432" rIns="27432" tIns="18288" bIns="18288" anchor="ctr">
+          <a:bodyPr wrap="none" lIns="18288" rIns="18288" tIns="18288" bIns="18288" anchor="t">
+            <a:spAutoFit/>
+          </a:bodyPr>
+          <a:lstStyle/>
+          <a:p>
+            <a:pPr algn="l">
+              <a:spcAft>
+                <a:spcPts val="0"/>
+              </a:spcAft>
+            </a:pPr>
+            <a:r>
+              <a:rPr sz="1350" b="1" i="0">
+                <a:solidFill>
+                  <a:srgbClr val="8EDBD4"/>
+                </a:solidFill>
+                <a:latin typeface="Arial"/>
+              </a:rPr>
+              <a:t>Curvature varies along the jet and drives the flow</a:t>
+            </a:r>
+          </a:p>
+        </p:txBody>
+      </p:sp>
+      <p:sp>
+        <p:nvSpPr>
+          <p:cNvPr id="31" name="C3-E20 round_rect 29" descr="sci-ppt:o029"/>
+          <p:cNvSpPr/>
+          <p:nvPr/>
+        </p:nvSpPr>
+        <p:spPr>
+          <a:xfrm>
+            <a:off x="6766560" y="914400"/>
+            <a:ext cx="5074920" cy="2148840"/>
+          </a:xfrm>
+          <a:prstGeom prst="roundRect">
+            <a:avLst/>
+          </a:prstGeom>
+          <a:solidFill>
+            <a:srgbClr val="213E4B"/>
+          </a:solidFill>
+          <a:ln w="20320">
+            <a:solidFill>
+              <a:srgbClr val="F2B880"/>
+            </a:solidFill>
+          </a:ln>
+          <a:effectLst/>
+        </p:spPr>
+        <p:txBody>
+          <a:bodyPr rtlCol="0" anchor="ctr"/>
+          <a:lstStyle/>
+          <a:p>
+            <a:pPr algn="ctr"/>
+          </a:p>
+        </p:txBody>
+      </p:sp>
+      <p:sp>
+        <p:nvSpPr>
+          <p:cNvPr id="32" name="C3-E20 text 30" descr="sci-ppt:o030"/>
+          <p:cNvSpPr txBox="1"/>
+          <p:nvPr/>
+        </p:nvSpPr>
+        <p:spPr>
+          <a:xfrm>
+            <a:off x="6876288" y="969264"/>
+            <a:ext cx="4855464" cy="247142"/>
+          </a:xfrm>
+          <a:prstGeom prst="rect">
+            <a:avLst/>
+          </a:prstGeom>
+          <a:noFill/>
+          <a:effectLst/>
+        </p:spPr>
+        <p:txBody>
+          <a:bodyPr wrap="none" lIns="18288" rIns="18288" tIns="18288" bIns="18288" anchor="t">
+            <a:spAutoFit/>
+          </a:bodyPr>
+          <a:lstStyle/>
+          <a:p>
+            <a:pPr algn="l">
+              <a:spcAft>
+                <a:spcPts val="0"/>
+              </a:spcAft>
+            </a:pPr>
+            <a:r>
+              <a:rPr sz="1300" b="1" i="0">
+                <a:solidFill>
+                  <a:srgbClr val="F2B880"/>
+                </a:solidFill>
+                <a:latin typeface="Arial"/>
+              </a:rPr>
+              <a:t>Why the factor is three</a:t>
+            </a:r>
+          </a:p>
+        </p:txBody>
+      </p:sp>
+      <p:sp>
+        <p:nvSpPr>
+          <p:cNvPr id="33" name="C3-E20 text 31" descr="sci-ppt:o031"/>
+          <p:cNvSpPr txBox="1"/>
+          <p:nvPr/>
+        </p:nvSpPr>
+        <p:spPr>
+          <a:xfrm>
+            <a:off x="6903720" y="1371600"/>
+            <a:ext cx="4846320" cy="231648"/>
+          </a:xfrm>
+          <a:prstGeom prst="rect">
+            <a:avLst/>
+          </a:prstGeom>
+          <a:noFill/>
+          <a:effectLst/>
+        </p:spPr>
+        <p:txBody>
+          <a:bodyPr wrap="none" lIns="18288" rIns="18288" tIns="18288" bIns="18288" anchor="t">
+            <a:spAutoFit/>
+          </a:bodyPr>
+          <a:lstStyle/>
+          <a:p>
+            <a:pPr algn="l">
+              <a:spcAft>
+                <a:spcPts val="0"/>
+              </a:spcAft>
+            </a:pPr>
+            <a:r>
+              <a:rPr sz="1200" b="1" i="0">
+                <a:solidFill>
+                  <a:srgbClr val="E7F0F3"/>
+                </a:solidFill>
+                <a:latin typeface="Arial"/>
+              </a:rPr>
+              <a:t>uᵣ = −(r/2) ∂_z v,   τ_zz = 2μ ∂_z v,   τᵣᵣ = −μ ∂_z v</a:t>
+            </a:r>
+          </a:p>
+        </p:txBody>
+      </p:sp>
+      <p:sp>
+        <p:nvSpPr>
+          <p:cNvPr id="34" name="C3-E20 text 32" descr="sci-ppt:o032"/>
+          <p:cNvSpPr txBox="1"/>
+          <p:nvPr/>
+        </p:nvSpPr>
+        <p:spPr>
+          <a:xfrm>
+            <a:off x="6903720" y="1920240"/>
+            <a:ext cx="4846320" cy="433070"/>
+          </a:xfrm>
+          <a:prstGeom prst="rect">
+            <a:avLst/>
+          </a:prstGeom>
+          <a:noFill/>
+          <a:effectLst/>
+        </p:spPr>
+        <p:txBody>
+          <a:bodyPr wrap="none" lIns="18288" rIns="18288" tIns="18288" bIns="18288" anchor="t">
+            <a:spAutoFit/>
+          </a:bodyPr>
+          <a:lstStyle/>
+          <a:p>
+            <a:pPr algn="l">
+              <a:spcAft>
+                <a:spcPts val="0"/>
+              </a:spcAft>
+            </a:pPr>
+            <a:r>
+              <a:rPr sz="1250" b="0" i="0">
+                <a:solidFill>
+                  <a:srgbClr val="F2B880"/>
+                </a:solidFill>
+                <a:latin typeface="Arial"/>
+              </a:rPr>
+              <a:t>τ_zz − τᵣᵣ = 3μ ∂_z v:  extensional stress is three times</a:t>
+            </a:r>
+          </a:p>
+          <a:p>
+            <a:pPr algn="l">
+              <a:spcAft>
+                <a:spcPts val="0"/>
+              </a:spcAft>
+            </a:pPr>
+            <a:r>
+              <a:rPr sz="1250" b="0" i="0">
+                <a:solidFill>
+                  <a:srgbClr val="F2B880"/>
+                </a:solidFill>
+                <a:latin typeface="Arial"/>
+              </a:rPr>
+              <a:t>the shear-viscosity scale.</a:t>
+            </a:r>
+          </a:p>
+        </p:txBody>
+      </p:sp>
+      <p:sp>
+        <p:nvSpPr>
+          <p:cNvPr id="35" name="C3-E20 text 33" descr="sci-ppt:o033"/>
+          <p:cNvSpPr txBox="1"/>
+          <p:nvPr/>
+        </p:nvSpPr>
+        <p:spPr>
+          <a:xfrm>
+            <a:off x="6858000" y="3264408"/>
+            <a:ext cx="2103120" cy="231648"/>
+          </a:xfrm>
+          <a:prstGeom prst="rect">
+            <a:avLst/>
+          </a:prstGeom>
+          <a:noFill/>
+          <a:effectLst/>
+        </p:spPr>
+        <p:txBody>
+          <a:bodyPr wrap="none" lIns="18288" rIns="18288" tIns="18288" bIns="18288" anchor="t">
+            <a:spAutoFit/>
+          </a:bodyPr>
+          <a:lstStyle/>
+          <a:p>
+            <a:pPr algn="l">
+              <a:spcAft>
+                <a:spcPts val="0"/>
+              </a:spcAft>
+            </a:pPr>
+            <a:r>
+              <a:rPr sz="1200" b="0" i="0">
+                <a:solidFill>
+                  <a:srgbClr val="E7F0F3"/>
+                </a:solidFill>
+                <a:latin typeface="Arial"/>
+              </a:rPr>
+              <a:t>simple shear: μ</a:t>
+            </a:r>
+          </a:p>
+        </p:txBody>
+      </p:sp>
+      <p:sp>
+        <p:nvSpPr>
+          <p:cNvPr id="36" name="C3-E20 rect 34" descr="sci-ppt:o034"/>
+          <p:cNvSpPr/>
+          <p:nvPr/>
+        </p:nvSpPr>
+        <p:spPr>
+          <a:xfrm>
+            <a:off x="9052560" y="3246120"/>
+            <a:ext cx="471487" cy="365760"/>
+          </a:xfrm>
+          <a:prstGeom prst="rect">
+            <a:avLst/>
+          </a:prstGeom>
+          <a:solidFill>
+            <a:srgbClr val="7FC8F8">
+              <a:alpha val="85000"/>
+            </a:srgbClr>
+          </a:solidFill>
+          <a:ln w="12700">
+            <a:solidFill>
+              <a:srgbClr val="7FC8F8">
+                <a:alpha val="85000"/>
+              </a:srgbClr>
+            </a:solidFill>
+          </a:ln>
+          <a:effectLst/>
+        </p:spPr>
+        <p:txBody>
+          <a:bodyPr rtlCol="0" anchor="ctr"/>
+          <a:lstStyle/>
+          <a:p>
+            <a:pPr algn="ctr"/>
+          </a:p>
+        </p:txBody>
+      </p:sp>
+      <p:sp>
+        <p:nvSpPr>
+          <p:cNvPr id="37" name="C3-E20 text 35" descr="sci-ppt:o035"/>
+          <p:cNvSpPr txBox="1"/>
+          <p:nvPr/>
+        </p:nvSpPr>
+        <p:spPr>
+          <a:xfrm>
+            <a:off x="9597199" y="3291839"/>
+            <a:ext cx="1371600" cy="231648"/>
+          </a:xfrm>
+          <a:prstGeom prst="rect">
+            <a:avLst/>
+          </a:prstGeom>
+          <a:noFill/>
+          <a:effectLst/>
+        </p:spPr>
+        <p:txBody>
+          <a:bodyPr wrap="none" lIns="18288" rIns="18288" tIns="18288" bIns="18288" anchor="t">
+            <a:spAutoFit/>
+          </a:bodyPr>
+          <a:lstStyle/>
+          <a:p>
+            <a:pPr algn="l">
+              <a:spcAft>
+                <a:spcPts val="0"/>
+              </a:spcAft>
+            </a:pPr>
+            <a:r>
+              <a:rPr sz="1200" b="1" i="0">
+                <a:solidFill>
+                  <a:srgbClr val="E7F0F3"/>
+                </a:solidFill>
+                <a:latin typeface="Arial"/>
+              </a:rPr>
+              <a:t>1μ</a:t>
+            </a:r>
+          </a:p>
+        </p:txBody>
+      </p:sp>
+      <p:sp>
+        <p:nvSpPr>
+          <p:cNvPr id="38" name="C3-E20 text 36" descr="sci-ppt:o036"/>
+          <p:cNvSpPr txBox="1"/>
+          <p:nvPr/>
+        </p:nvSpPr>
+        <p:spPr>
+          <a:xfrm>
+            <a:off x="6858000" y="3813048"/>
+            <a:ext cx="2103120" cy="231648"/>
+          </a:xfrm>
+          <a:prstGeom prst="rect">
+            <a:avLst/>
+          </a:prstGeom>
+          <a:noFill/>
+          <a:effectLst/>
+        </p:spPr>
+        <p:txBody>
+          <a:bodyPr wrap="none" lIns="18288" rIns="18288" tIns="18288" bIns="18288" anchor="t">
+            <a:spAutoFit/>
+          </a:bodyPr>
+          <a:lstStyle/>
+          <a:p>
+            <a:pPr algn="l">
+              <a:spcAft>
+                <a:spcPts val="0"/>
+              </a:spcAft>
+            </a:pPr>
+            <a:r>
+              <a:rPr sz="1200" b="0" i="0">
+                <a:solidFill>
+                  <a:srgbClr val="E7F0F3"/>
+                </a:solidFill>
+                <a:latin typeface="Arial"/>
+              </a:rPr>
+              <a:t>stretching: 3μ</a:t>
+            </a:r>
+          </a:p>
+        </p:txBody>
+      </p:sp>
+      <p:sp>
+        <p:nvSpPr>
+          <p:cNvPr id="39" name="C3-E20 rect 37" descr="sci-ppt:o037"/>
+          <p:cNvSpPr/>
+          <p:nvPr/>
+        </p:nvSpPr>
+        <p:spPr>
+          <a:xfrm>
+            <a:off x="9052560" y="3794760"/>
+            <a:ext cx="1414462" cy="365760"/>
+          </a:xfrm>
+          <a:prstGeom prst="rect">
+            <a:avLst/>
+          </a:prstGeom>
+          <a:solidFill>
+            <a:srgbClr val="F2B880">
+              <a:alpha val="85000"/>
+            </a:srgbClr>
+          </a:solidFill>
+          <a:ln w="12700">
+            <a:solidFill>
+              <a:srgbClr val="F2B880">
+                <a:alpha val="85000"/>
+              </a:srgbClr>
+            </a:solidFill>
+          </a:ln>
+          <a:effectLst/>
+        </p:spPr>
+        <p:txBody>
+          <a:bodyPr rtlCol="0" anchor="ctr"/>
+          <a:lstStyle/>
+          <a:p>
+            <a:pPr algn="ctr"/>
+          </a:p>
+        </p:txBody>
+      </p:sp>
+      <p:sp>
+        <p:nvSpPr>
+          <p:cNvPr id="40" name="C3-E20 text 38" descr="sci-ppt:o038"/>
+          <p:cNvSpPr txBox="1"/>
+          <p:nvPr/>
+        </p:nvSpPr>
+        <p:spPr>
+          <a:xfrm>
+            <a:off x="10540174" y="3840480"/>
+            <a:ext cx="1371600" cy="231648"/>
+          </a:xfrm>
+          <a:prstGeom prst="rect">
+            <a:avLst/>
+          </a:prstGeom>
+          <a:noFill/>
+          <a:effectLst/>
+        </p:spPr>
+        <p:txBody>
+          <a:bodyPr wrap="none" lIns="18288" rIns="18288" tIns="18288" bIns="18288" anchor="t">
+            <a:spAutoFit/>
+          </a:bodyPr>
+          <a:lstStyle/>
+          <a:p>
+            <a:pPr algn="l">
+              <a:spcAft>
+                <a:spcPts val="0"/>
+              </a:spcAft>
+            </a:pPr>
+            <a:r>
+              <a:rPr sz="1200" b="1" i="0">
+                <a:solidFill>
+                  <a:srgbClr val="E7F0F3"/>
+                </a:solidFill>
+                <a:latin typeface="Arial"/>
+              </a:rPr>
+              <a:t>3μ</a:t>
+            </a:r>
+          </a:p>
+        </p:txBody>
+      </p:sp>
+      <p:sp>
+        <p:nvSpPr>
+          <p:cNvPr id="41" name="C3-E20 text 39" descr="sci-ppt:o039"/>
+          <p:cNvSpPr txBox="1"/>
+          <p:nvPr/>
+        </p:nvSpPr>
+        <p:spPr>
+          <a:xfrm>
+            <a:off x="6858000" y="4480560"/>
+            <a:ext cx="4937760" cy="231648"/>
+          </a:xfrm>
+          <a:prstGeom prst="rect">
+            <a:avLst/>
+          </a:prstGeom>
+          <a:noFill/>
+          <a:effectLst/>
+        </p:spPr>
+        <p:txBody>
+          <a:bodyPr wrap="none" lIns="18288" rIns="18288" tIns="18288" bIns="18288" anchor="t">
+            <a:spAutoFit/>
+          </a:bodyPr>
+          <a:lstStyle/>
+          <a:p>
+            <a:pPr algn="l">
+              <a:spcAft>
+                <a:spcPts val="0"/>
+              </a:spcAft>
+            </a:pPr>
+            <a:r>
+              <a:rPr sz="1200" b="1" i="0">
+                <a:solidFill>
+                  <a:srgbClr val="E7F0F3"/>
+                </a:solidFill>
+                <a:latin typeface="Arial"/>
+              </a:rPr>
+              <a:t>∂ₜv + v∂_z v = −(σⱼ/ρ) ∂_z κ + [3μ/(ρA)] ∂_z(A ∂_z v)</a:t>
+            </a:r>
+          </a:p>
+        </p:txBody>
+      </p:sp>
+      <p:sp>
+        <p:nvSpPr>
+          <p:cNvPr id="42" name="C3-E20 text 40" descr="sci-ppt:o040"/>
+          <p:cNvSpPr txBox="1"/>
+          <p:nvPr/>
+        </p:nvSpPr>
+        <p:spPr>
+          <a:xfrm>
+            <a:off x="914400" y="5486400"/>
+            <a:ext cx="5486400" cy="417576"/>
+          </a:xfrm>
+          <a:prstGeom prst="rect">
+            <a:avLst/>
+          </a:prstGeom>
+          <a:noFill/>
+          <a:effectLst/>
+        </p:spPr>
+        <p:txBody>
+          <a:bodyPr wrap="none" lIns="18288" rIns="18288" tIns="18288" bIns="18288" anchor="t">
+            <a:spAutoFit/>
+          </a:bodyPr>
+          <a:lstStyle/>
+          <a:p>
+            <a:pPr algn="l">
+              <a:spcAft>
+                <a:spcPts val="0"/>
+              </a:spcAft>
+            </a:pPr>
+            <a:r>
+              <a:rPr sz="1200" b="0" i="0">
+                <a:solidFill>
+                  <a:srgbClr val="E7F0F3"/>
+                </a:solidFill>
+                <a:latin typeface="Arial"/>
+              </a:rPr>
+              <a:t>Where the jet is thinner (a &lt; a₀ with k a₀ &lt; 1) κ is larger, so</a:t>
+            </a:r>
+          </a:p>
+          <a:p>
+            <a:pPr algn="l">
+              <a:spcAft>
+                <a:spcPts val="0"/>
+              </a:spcAft>
+            </a:pPr>
+            <a:r>
+              <a:rPr sz="1200" b="0" i="0">
+                <a:solidFill>
+                  <a:srgbClr val="E7F0F3"/>
+                </a:solidFill>
+                <a:latin typeface="Arial"/>
+              </a:rPr>
+              <a:t>pressure pushes liquid toward the thicker parts.</a:t>
+            </a:r>
+          </a:p>
+        </p:txBody>
+      </p:sp>
+      <p:sp>
+        <p:nvSpPr>
+          <p:cNvPr id="43" name="C3-E20 text 41" descr="sci-ppt:o041"/>
+          <p:cNvSpPr txBox="1"/>
+          <p:nvPr/>
+        </p:nvSpPr>
+        <p:spPr>
+          <a:xfrm>
+            <a:off x="6858000" y="5074920"/>
+            <a:ext cx="4937760" cy="402081"/>
+          </a:xfrm>
+          <a:prstGeom prst="rect">
+            <a:avLst/>
+          </a:prstGeom>
+          <a:noFill/>
+          <a:effectLst/>
+        </p:spPr>
+        <p:txBody>
+          <a:bodyPr wrap="none" lIns="18288" rIns="18288" tIns="18288" bIns="18288" anchor="t">
             <a:spAutoFit/>
           </a:bodyPr>
           <a:lstStyle/>
@@ -3527,33 +5889,9 @@
                 </a:solidFill>
                 <a:latin typeface="Arial"/>
               </a:rPr>
-              <a:t>• r radial; z axial</a:t>
-            </a:r>
-          </a:p>
-        </p:txBody>
-      </p:sp>
-      <p:sp>
-        <p:nvSpPr>
-          <p:cNvPr id="14" name="C3-E20 text 12" descr="sci-ppt:o012"/>
-          <p:cNvSpPr txBox="1"/>
-          <p:nvPr/>
-        </p:nvSpPr>
-        <p:spPr>
-          <a:xfrm>
-            <a:off x="320040" y="4329684"/>
-            <a:ext cx="5715000" cy="246888"/>
-          </a:xfrm>
-          <a:prstGeom prst="rect">
-            <a:avLst/>
-          </a:prstGeom>
-          <a:noFill/>
-          <a:effectLst/>
-        </p:spPr>
-        <p:txBody>
-          <a:bodyPr wrap="square" lIns="27432" rIns="27432" tIns="18288" bIns="18288" anchor="ctr">
-            <a:spAutoFit/>
-          </a:bodyPr>
-          <a:lstStyle/>
+              <a:t>The slender axial momentum law keeps the full geometric</a:t>
+            </a:r>
+          </a:p>
           <a:p>
             <a:pPr algn="l">
               <a:spcAft>
@@ -3567,21 +5905,21 @@
                 </a:solidFill>
                 <a:latin typeface="Arial"/>
               </a:rPr>
-              <a:t>• u_r radial; v axial</a:t>
-            </a:r>
-          </a:p>
-        </p:txBody>
-      </p:sp>
-      <p:sp>
-        <p:nvSpPr>
-          <p:cNvPr id="15" name="C3-E20 text 13" descr="sci-ppt:o013"/>
+              <a:t>curvature.</a:t>
+            </a:r>
+          </a:p>
+        </p:txBody>
+      </p:sp>
+      <p:sp>
+        <p:nvSpPr>
+          <p:cNvPr id="44" name="C3-E20 text 42" descr="sci-ppt:o042"/>
           <p:cNvSpPr txBox="1"/>
           <p:nvPr/>
         </p:nvSpPr>
         <p:spPr>
           <a:xfrm>
-            <a:off x="6217920" y="4329684"/>
-            <a:ext cx="5715000" cy="246888"/>
+            <a:off x="320040" y="6510528"/>
+            <a:ext cx="11521440" cy="200660"/>
           </a:xfrm>
           <a:prstGeom prst="rect">
             <a:avLst/>
@@ -3590,287 +5928,7 @@
           <a:effectLst/>
         </p:spPr>
         <p:txBody>
-          <a:bodyPr wrap="square" lIns="27432" rIns="27432" tIns="18288" bIns="18288" anchor="ctr">
-            <a:spAutoFit/>
-          </a:bodyPr>
-          <a:lstStyle/>
-          <a:p>
-            <a:pPr algn="l">
-              <a:spcAft>
-                <a:spcPts val="0"/>
-              </a:spcAft>
-            </a:pPr>
-            <a:r>
-              <a:rPr sz="1150" b="0" i="0">
-                <a:solidFill>
-                  <a:srgbClr val="B4C7D2"/>
-                </a:solidFill>
-                <a:latin typeface="Arial"/>
-              </a:rPr>
-              <a:t>• τ_zz − τ_rr = 3μ ∂zv</a:t>
-            </a:r>
-          </a:p>
-        </p:txBody>
-      </p:sp>
-      <p:sp>
-        <p:nvSpPr>
-          <p:cNvPr id="16" name="C3-E20 text 14" descr="sci-ppt:o014"/>
-          <p:cNvSpPr txBox="1"/>
-          <p:nvPr/>
-        </p:nvSpPr>
-        <p:spPr>
-          <a:xfrm>
-            <a:off x="320040" y="4562856"/>
-            <a:ext cx="5715000" cy="246888"/>
-          </a:xfrm>
-          <a:prstGeom prst="rect">
-            <a:avLst/>
-          </a:prstGeom>
-          <a:noFill/>
-          <a:effectLst/>
-        </p:spPr>
-        <p:txBody>
-          <a:bodyPr wrap="square" lIns="27432" rIns="27432" tIns="18288" bIns="18288" anchor="ctr">
-            <a:spAutoFit/>
-          </a:bodyPr>
-          <a:lstStyle/>
-          <a:p>
-            <a:pPr algn="l">
-              <a:spcAft>
-                <a:spcPts val="0"/>
-              </a:spcAft>
-            </a:pPr>
-            <a:r>
-              <a:rPr sz="1150" b="0" i="0">
-                <a:solidFill>
-                  <a:srgbClr val="B4C7D2"/>
-                </a:solidFill>
-                <a:latin typeface="Arial"/>
-              </a:rPr>
-              <a:t>• κ surface curvature</a:t>
-            </a:r>
-          </a:p>
-        </p:txBody>
-      </p:sp>
-      <p:sp>
-        <p:nvSpPr>
-          <p:cNvPr id="17" name="C3-E20 text 15" descr="sci-ppt:o015"/>
-          <p:cNvSpPr txBox="1"/>
-          <p:nvPr/>
-        </p:nvSpPr>
-        <p:spPr>
-          <a:xfrm>
-            <a:off x="6217920" y="4562856"/>
-            <a:ext cx="5715000" cy="246888"/>
-          </a:xfrm>
-          <a:prstGeom prst="rect">
-            <a:avLst/>
-          </a:prstGeom>
-          <a:noFill/>
-          <a:effectLst/>
-        </p:spPr>
-        <p:txBody>
-          <a:bodyPr wrap="square" lIns="27432" rIns="27432" tIns="18288" bIns="18288" anchor="ctr">
-            <a:spAutoFit/>
-          </a:bodyPr>
-          <a:lstStyle/>
-          <a:p>
-            <a:pPr algn="l">
-              <a:spcAft>
-                <a:spcPts val="0"/>
-              </a:spcAft>
-            </a:pPr>
-            <a:r>
-              <a:rPr sz="1150" b="0" i="0">
-                <a:solidFill>
-                  <a:srgbClr val="B4C7D2"/>
-                </a:solidFill>
-                <a:latin typeface="Arial"/>
-              </a:rPr>
-              <a:t>• σ_j, ρ, μ</a:t>
-            </a:r>
-          </a:p>
-        </p:txBody>
-      </p:sp>
-      <p:sp>
-        <p:nvSpPr>
-          <p:cNvPr id="18" name="C3-E20 text 16" descr="sci-ppt:o016"/>
-          <p:cNvSpPr txBox="1"/>
-          <p:nvPr/>
-        </p:nvSpPr>
-        <p:spPr>
-          <a:xfrm>
-            <a:off x="320040" y="4796028"/>
-            <a:ext cx="5715000" cy="246888"/>
-          </a:xfrm>
-          <a:prstGeom prst="rect">
-            <a:avLst/>
-          </a:prstGeom>
-          <a:noFill/>
-          <a:effectLst/>
-        </p:spPr>
-        <p:txBody>
-          <a:bodyPr wrap="square" lIns="27432" rIns="27432" tIns="18288" bIns="18288" anchor="ctr">
-            <a:spAutoFit/>
-          </a:bodyPr>
-          <a:lstStyle/>
-          <a:p>
-            <a:pPr algn="l">
-              <a:spcAft>
-                <a:spcPts val="0"/>
-              </a:spcAft>
-            </a:pPr>
-            <a:r>
-              <a:rPr sz="1150" b="0" i="0">
-                <a:solidFill>
-                  <a:srgbClr val="B4C7D2"/>
-                </a:solidFill>
-                <a:latin typeface="Arial"/>
-              </a:rPr>
-              <a:t>• ∂r, ∂z, ∂zz, ∂ₜ, t</a:t>
-            </a:r>
-          </a:p>
-        </p:txBody>
-      </p:sp>
-      <p:sp>
-        <p:nvSpPr>
-          <p:cNvPr id="19" name="C3-E20 text 17" descr="sci-ppt:o017"/>
-          <p:cNvSpPr txBox="1"/>
-          <p:nvPr/>
-        </p:nvSpPr>
-        <p:spPr>
-          <a:xfrm>
-            <a:off x="320040" y="5596128"/>
-            <a:ext cx="11430000" cy="292608"/>
-          </a:xfrm>
-          <a:prstGeom prst="rect">
-            <a:avLst/>
-          </a:prstGeom>
-          <a:noFill/>
-          <a:effectLst/>
-        </p:spPr>
-        <p:txBody>
-          <a:bodyPr wrap="square" lIns="27432" rIns="27432" tIns="18288" bIns="18288" anchor="ctr">
-            <a:spAutoFit/>
-          </a:bodyPr>
-          <a:lstStyle/>
-          <a:p>
-            <a:pPr algn="l">
-              <a:spcAft>
-                <a:spcPts val="0"/>
-              </a:spcAft>
-            </a:pPr>
-            <a:r>
-              <a:rPr sz="1150" b="0" i="0">
-                <a:solidFill>
-                  <a:srgbClr val="8EDBD4"/>
-                </a:solidFill>
-                <a:latin typeface="Arial"/>
-              </a:rPr>
-              <a:t>Regular radial velocity vanishes at r = 0</a:t>
-            </a:r>
-          </a:p>
-        </p:txBody>
-      </p:sp>
-      <p:sp>
-        <p:nvSpPr>
-          <p:cNvPr id="20" name="C3-E20 text 18" descr="sci-ppt:o018"/>
-          <p:cNvSpPr txBox="1"/>
-          <p:nvPr/>
-        </p:nvSpPr>
-        <p:spPr>
-          <a:xfrm>
-            <a:off x="320040" y="5870448"/>
-            <a:ext cx="11430000" cy="292608"/>
-          </a:xfrm>
-          <a:prstGeom prst="rect">
-            <a:avLst/>
-          </a:prstGeom>
-          <a:noFill/>
-          <a:effectLst/>
-        </p:spPr>
-        <p:txBody>
-          <a:bodyPr wrap="square" lIns="27432" rIns="27432" tIns="18288" bIns="18288" anchor="ctr">
-            <a:spAutoFit/>
-          </a:bodyPr>
-          <a:lstStyle/>
-          <a:p>
-            <a:pPr algn="l">
-              <a:spcAft>
-                <a:spcPts val="0"/>
-              </a:spcAft>
-            </a:pPr>
-            <a:r>
-              <a:rPr sz="1150" b="0" i="0">
-                <a:solidFill>
-                  <a:srgbClr val="8EDBD4"/>
-                </a:solidFill>
-                <a:latin typeface="Arial"/>
-              </a:rPr>
-              <a:t>Curvature gradients drive axial redistribution</a:t>
-            </a:r>
-          </a:p>
-        </p:txBody>
-      </p:sp>
-      <p:sp>
-        <p:nvSpPr>
-          <p:cNvPr id="21" name="C3-E20 text 19" descr="sci-ppt:o019"/>
-          <p:cNvSpPr txBox="1"/>
-          <p:nvPr/>
-        </p:nvSpPr>
-        <p:spPr>
-          <a:xfrm>
-            <a:off x="320040" y="6144768"/>
-            <a:ext cx="11430000" cy="292608"/>
-          </a:xfrm>
-          <a:prstGeom prst="rect">
-            <a:avLst/>
-          </a:prstGeom>
-          <a:noFill/>
-          <a:effectLst/>
-        </p:spPr>
-        <p:txBody>
-          <a:bodyPr wrap="square" lIns="27432" rIns="27432" tIns="18288" bIns="18288" anchor="ctr">
-            <a:spAutoFit/>
-          </a:bodyPr>
-          <a:lstStyle/>
-          <a:p>
-            <a:pPr algn="l">
-              <a:spcAft>
-                <a:spcPts val="0"/>
-              </a:spcAft>
-            </a:pPr>
-            <a:r>
-              <a:rPr sz="1150" b="0" i="0">
-                <a:solidFill>
-                  <a:srgbClr val="8EDBD4"/>
-                </a:solidFill>
-                <a:latin typeface="Arial"/>
-              </a:rPr>
-              <a:t>Surrounding dense liquid requires a two-fluid treatment</a:t>
-            </a:r>
-          </a:p>
-        </p:txBody>
-      </p:sp>
-      <p:sp>
-        <p:nvSpPr>
-          <p:cNvPr id="22" name="C3-E20 text 20" descr="sci-ppt:o020"/>
-          <p:cNvSpPr txBox="1"/>
-          <p:nvPr/>
-        </p:nvSpPr>
-        <p:spPr>
-          <a:xfrm>
-            <a:off x="320040" y="6473952"/>
-            <a:ext cx="11430000" cy="256032"/>
-          </a:xfrm>
-          <a:prstGeom prst="rect">
-            <a:avLst/>
-          </a:prstGeom>
-          <a:noFill/>
-          <a:effectLst/>
-        </p:spPr>
-        <p:txBody>
-          <a:bodyPr wrap="square" lIns="27432" rIns="27432" tIns="18288" bIns="18288" anchor="ctr">
+          <a:bodyPr wrap="none" lIns="18288" rIns="18288" tIns="18288" bIns="18288" anchor="t">
             <a:spAutoFit/>
           </a:bodyPr>
           <a:lstStyle/>
@@ -3887,7 +5945,7 @@
                 </a:solidFill>
                 <a:latin typeface="Arial"/>
               </a:rPr>
-              <a:t>Model schematic; geometry is not to scale.</a:t>
+              <a:t>Newtonian stress and slender momentum of Eq. C3-E20.</a:t>
             </a:r>
           </a:p>
         </p:txBody>
